--- a/decks/03-cag-financial-document.pptx
+++ b/decks/03-cag-financial-document.pptx
@@ -2,19 +2,19 @@
 <file path=ppt/presentation.xml><?xml version="1.0" encoding="utf-8"?>
 <p:presentation xmlns:p="http://schemas.openxmlformats.org/presentationml/2006/main">
   <p:sldMasterIdLst>
-    <p:sldMasterId xmlns:r="http://schemas.openxmlformats.org/officeDocument/2006/relationships" id="2147483648" r:id="R9a1a195022354c97"/>
+    <p:sldMasterId xmlns:r="http://schemas.openxmlformats.org/officeDocument/2006/relationships" id="2147483648" r:id="Rfe92902160a44f93"/>
   </p:sldMasterIdLst>
   <p:notesMasterIdLst>
-    <p:notesMasterId xmlns:r="http://schemas.openxmlformats.org/officeDocument/2006/relationships" r:id="Rf81ecdf2599d4ea3"/>
+    <p:notesMasterId xmlns:r="http://schemas.openxmlformats.org/officeDocument/2006/relationships" r:id="Rcd8245817adf417a"/>
   </p:notesMasterIdLst>
   <p:sldIdLst>
-    <p:sldId xmlns:r="http://schemas.openxmlformats.org/officeDocument/2006/relationships" id="256" r:id="R3357926226ce4e81"/>
-    <p:sldId xmlns:r="http://schemas.openxmlformats.org/officeDocument/2006/relationships" id="257" r:id="Re55b7b5cbd98475b"/>
-    <p:sldId xmlns:r="http://schemas.openxmlformats.org/officeDocument/2006/relationships" id="258" r:id="Ra239a3e9b62c49fc"/>
-    <p:sldId xmlns:r="http://schemas.openxmlformats.org/officeDocument/2006/relationships" id="259" r:id="R659fd9eccc034404"/>
-    <p:sldId xmlns:r="http://schemas.openxmlformats.org/officeDocument/2006/relationships" id="260" r:id="R55bfef7c2b0e4e6d"/>
-    <p:sldId xmlns:r="http://schemas.openxmlformats.org/officeDocument/2006/relationships" id="261" r:id="R1e1a816a53af4b57"/>
-    <p:sldId xmlns:r="http://schemas.openxmlformats.org/officeDocument/2006/relationships" id="262" r:id="R6456ac5e49ca4111"/>
+    <p:sldId xmlns:r="http://schemas.openxmlformats.org/officeDocument/2006/relationships" id="256" r:id="R4d24a3c99801437a"/>
+    <p:sldId xmlns:r="http://schemas.openxmlformats.org/officeDocument/2006/relationships" id="257" r:id="R610eba24c6ef4c32"/>
+    <p:sldId xmlns:r="http://schemas.openxmlformats.org/officeDocument/2006/relationships" id="258" r:id="R51bc08969ac5430a"/>
+    <p:sldId xmlns:r="http://schemas.openxmlformats.org/officeDocument/2006/relationships" id="259" r:id="R3cb08bfdbc4f45d4"/>
+    <p:sldId xmlns:r="http://schemas.openxmlformats.org/officeDocument/2006/relationships" id="260" r:id="Rb844df666a864661"/>
+    <p:sldId xmlns:r="http://schemas.openxmlformats.org/officeDocument/2006/relationships" id="261" r:id="Rb9c1aed71d8940bd"/>
+    <p:sldId xmlns:r="http://schemas.openxmlformats.org/officeDocument/2006/relationships" id="262" r:id="R02b38c7974334bb7"/>
   </p:sldIdLst>
   <p:sldSz cx="15240000" cy="8572500"/>
   <p:notesSz cx="6858000" cy="9144000"/>
@@ -448,7 +448,7 @@
           <a:lstStyle xmlns:a="http://schemas.openxmlformats.org/drawingml/2006/main"/>
           <a:p xmlns:a="http://schemas.openxmlformats.org/drawingml/2006/main">
             <a:r>
-              <a:t>Open with the engineering question: when is the simplest complete-document path sufficient, and when must the application retrieve evidence?</a:t>
+              <a:t>Connect structured outputs to the next application boundary: which source information enters each call.</a:t>
             </a:r>
           </a:p>
           <a:p xmlns:a="http://schemas.openxmlformats.org/drawingml/2006/main">
@@ -464,6 +464,11 @@
           <a:p xmlns:a="http://schemas.openxmlformats.org/drawingml/2006/main">
             <a:r>
               <a:t>- https://www.sec.gov/Archives/edgar/data/1045810/000104581026000021/nvda-20260125.htm</a:t>
+            </a:r>
+          </a:p>
+          <a:p xmlns:a="http://schemas.openxmlformats.org/drawingml/2006/main">
+            <a:r>
+              <a:t>- https://developers.openai.com/api/docs/guides/prompt-caching</a:t>
             </a:r>
           </a:p>
           <a:p xmlns:a="http://schemas.openxmlformats.org/drawingml/2006/main">
@@ -538,7 +543,7 @@
           <a:lstStyle xmlns:a="http://schemas.openxmlformats.org/drawingml/2006/main"/>
           <a:p xmlns:a="http://schemas.openxmlformats.org/drawingml/2006/main">
             <a:r>
-              <a:t>Separate context engineering from prompt wording. Walk through every token consumer, including the answer reservation.</a:t>
+              <a:t>Name the five mechanisms. Context supplies information now; Cache reuses a prefix; Memory retains state; Grounding checks evidence support; RAG selects evidence.</a:t>
             </a:r>
           </a:p>
           <a:p xmlns:a="http://schemas.openxmlformats.org/drawingml/2006/main">
@@ -554,6 +559,16 @@
           <a:p xmlns:a="http://schemas.openxmlformats.org/drawingml/2006/main">
             <a:r>
               <a:t>- https://developers.openai.com/api/docs/guides/prompt-caching</a:t>
+            </a:r>
+          </a:p>
+          <a:p xmlns:a="http://schemas.openxmlformats.org/drawingml/2006/main">
+            <a:r>
+              <a:t>- https://docs.langchain.com/oss/python/langgraph/add-memory</a:t>
+            </a:r>
+          </a:p>
+          <a:p xmlns:a="http://schemas.openxmlformats.org/drawingml/2006/main">
+            <a:r>
+              <a:t>- https://arxiv.org/abs/2005.11401</a:t>
             </a:r>
           </a:p>
           <a:p xmlns:a="http://schemas.openxmlformats.org/drawingml/2006/main">
@@ -628,7 +643,7 @@
           <a:lstStyle xmlns:a="http://schemas.openxmlformats.org/drawingml/2006/main"/>
           <a:p xmlns:a="http://schemas.openxmlformats.org/drawingml/2006/main">
             <a:r>
-              <a:t>Use this as the central architecture diagram. The budget gate is deterministic; grounding is verified after the model response.</a:t>
+              <a:t>Read ContextDecision as a typed application record: estimated input, available capacity, route and reason are produced before generation.</a:t>
             </a:r>
           </a:p>
           <a:p xmlns:a="http://schemas.openxmlformats.org/drawingml/2006/main">
@@ -643,7 +658,7 @@
           </a:p>
           <a:p xmlns:a="http://schemas.openxmlformats.org/drawingml/2006/main">
             <a:r>
-              <a:t>- https://www.sec.gov/Archives/edgar/data/1045810/000104581026000021/nvda-20260125.htm</a:t>
+              <a:t>- https://developers.openai.com/api/docs/guides/prompt-caching</a:t>
             </a:r>
           </a:p>
           <a:p xmlns:a="http://schemas.openxmlformats.org/drawingml/2006/main">
@@ -718,7 +733,7 @@
           <a:lstStyle xmlns:a="http://schemas.openxmlformats.org/drawingml/2006/main"/>
           <a:p xmlns:a="http://schemas.openxmlformats.org/drawingml/2006/main">
             <a:r>
-              <a:t>Exact prefix reuse is the portable design rule. A provider cache is an efficiency feature; inspect returned usage metadata before claiming a hit.</a:t>
+              <a:t>Only the stable prefix is reusable. The answer is generated for each question, and latency alone does not prove a cache hit.</a:t>
             </a:r>
           </a:p>
           <a:p xmlns:a="http://schemas.openxmlformats.org/drawingml/2006/main">
@@ -808,7 +823,7 @@
           <a:lstStyle xmlns:a="http://schemas.openxmlformats.org/drawingml/2006/main"/>
           <a:p xmlns:a="http://schemas.openxmlformats.org/drawingml/2006/main">
             <a:r>
-              <a:t>Distinguish capacity from attention. The cited study found that performance can vary with the position of relevant information in long contexts.</a:t>
+              <a:t>A context window is capacity, not guaranteed attention. Separate the deterministic budget gate from empirical question-level evaluation.</a:t>
             </a:r>
           </a:p>
           <a:p xmlns:a="http://schemas.openxmlformats.org/drawingml/2006/main">
@@ -824,11 +839,6 @@
           <a:p xmlns:a="http://schemas.openxmlformats.org/drawingml/2006/main">
             <a:r>
               <a:t>- https://arxiv.org/abs/2307.03172</a:t>
-            </a:r>
-          </a:p>
-          <a:p xmlns:a="http://schemas.openxmlformats.org/drawingml/2006/main">
-            <a:r>
-              <a:t>- https://developers.openai.com/api/docs/guides/prompt-caching</a:t>
             </a:r>
           </a:p>
           <a:p xmlns:a="http://schemas.openxmlformats.org/drawingml/2006/main">
@@ -903,7 +913,7 @@
           <a:lstStyle xmlns:a="http://schemas.openxmlformats.org/drawingml/2006/main"/>
           <a:p xmlns:a="http://schemas.openxmlformats.org/drawingml/2006/main">
             <a:r>
-              <a:t>Ask the class to choose the route for a single annual report, then for several years and companies. Record the route before generation.</a:t>
+              <a:t>Use complete context for one bounded stable source; use retrieval when evidence must be selected from a large or changing corpus.</a:t>
             </a:r>
           </a:p>
           <a:p xmlns:a="http://schemas.openxmlformats.org/drawingml/2006/main">
@@ -914,6 +924,11 @@
           <a:p xmlns:a="http://schemas.openxmlformats.org/drawingml/2006/main">
             <a:r>
               <a:t>[Sources]</a:t>
+            </a:r>
+          </a:p>
+          <a:p xmlns:a="http://schemas.openxmlformats.org/drawingml/2006/main">
+            <a:r>
+              <a:t>- https://arxiv.org/abs/2005.11401</a:t>
             </a:r>
           </a:p>
           <a:p xmlns:a="http://schemas.openxmlformats.org/drawingml/2006/main">
@@ -993,7 +1008,7 @@
           <a:lstStyle xmlns:a="http://schemas.openxmlformats.org/drawingml/2006/main"/>
           <a:p xmlns:a="http://schemas.openxmlformats.org/drawingml/2006/main">
             <a:r>
-              <a:t>Move into Notebook 03. Students will produce five figures, make two model calls and observe the budget gate reject a longer stress document.</a:t>
+              <a:t>Move into the notebook: budget the NVIDIA extract, inspect ContextDecision, measure two calls, then force an explicit RAG route.</a:t>
             </a:r>
           </a:p>
           <a:p xmlns:a="http://schemas.openxmlformats.org/drawingml/2006/main">
@@ -1014,11 +1029,6 @@
           <a:p xmlns:a="http://schemas.openxmlformats.org/drawingml/2006/main">
             <a:r>
               <a:t>- https://developers.openai.com/api/docs/guides/prompt-caching</a:t>
-            </a:r>
-          </a:p>
-          <a:p xmlns:a="http://schemas.openxmlformats.org/drawingml/2006/main">
-            <a:r>
-              <a:t>- https://arxiv.org/abs/2307.03172</a:t>
             </a:r>
           </a:p>
           <a:p xmlns:a="http://schemas.openxmlformats.org/drawingml/2006/main">
@@ -1091,7 +1101,7 @@
   </p:cSld>
   <p:clrMap bg1="lt1" tx1="dk1" bg2="lt2" tx2="dk2" accent1="accent1" accent2="accent2" accent3="accent3" accent4="accent4" accent5="accent5" accent6="accent6" hlink="hlink" folHlink="folHlink"/>
   <p:sldLayoutIdLst>
-    <p:sldLayoutId xmlns:r="http://schemas.openxmlformats.org/officeDocument/2006/relationships" id="2147483649" r:id="R331608b6371b4488"/>
+    <p:sldLayoutId xmlns:r="http://schemas.openxmlformats.org/officeDocument/2006/relationships" id="2147483649" r:id="R14f95d7655864968"/>
   </p:sldLayoutIdLst>
   <p:txStyles>
     <p:titleStyle>
@@ -2036,7 +2046,7 @@
                 <a:ea typeface="Calibri"/>
                 <a:cs typeface="Calibri"/>
               </a:rPr>
-              <a:t>CONTEXT COMPOSITION</a:t>
+              <a:t>SYSTEM BOUNDARIES</a:t>
             </a:r>
           </a:p>
         </p:txBody>
@@ -2093,7 +2103,7 @@
                 <a:ea typeface="Calibri"/>
                 <a:cs typeface="Calibri"/>
               </a:rPr>
-              <a:t>Context engineering controls what the model can see</a:t>
+              <a:t>Five mechanisms, five distinct responsibilities</a:t>
             </a:r>
           </a:p>
         </p:txBody>
@@ -2150,7 +2160,7 @@
                 <a:ea typeface="Calibri"/>
                 <a:cs typeface="Calibri"/>
               </a:rPr>
-              <a:t>STABLE POLICY</a:t>
+              <a:t>CONTEXT</a:t>
             </a:r>
           </a:p>
         </p:txBody>
@@ -2207,7 +2217,7 @@
                 <a:ea typeface="Calibri"/>
                 <a:cs typeface="Calibri"/>
               </a:rPr>
-              <a:t>Role, evidence rules and output contract</a:t>
+              <a:t>Information supplied to this model call</a:t>
             </a:r>
           </a:p>
         </p:txBody>
@@ -2297,7 +2307,7 @@
                 <a:ea typeface="Calibri"/>
                 <a:cs typeface="Calibri"/>
               </a:rPr>
-              <a:t>WORKING CONTEXT</a:t>
+              <a:t>CACHE</a:t>
             </a:r>
           </a:p>
         </p:txBody>
@@ -2354,7 +2364,7 @@
                 <a:ea typeface="Calibri"/>
                 <a:cs typeface="Calibri"/>
               </a:rPr>
-              <a:t>Complete document plus the current question</a:t>
+              <a:t>Reuse of an exact stable prefix</a:t>
             </a:r>
           </a:p>
         </p:txBody>
@@ -2446,7 +2456,7 @@
                 <a:ea typeface="Consolas"/>
                 <a:cs typeface="Consolas"/>
               </a:rPr>
-              <a:t>request = {</a:t>
+              <a:t>separate = {</a:t>
             </a:r>
           </a:p>
         </p:txBody>
@@ -2503,7 +2513,7 @@
                 <a:ea typeface="Consolas"/>
                 <a:cs typeface="Consolas"/>
               </a:rPr>
-              <a:t>  "instructions": stable_policy,</a:t>
+              <a:t>  "memory": interaction_state,</a:t>
             </a:r>
           </a:p>
         </p:txBody>
@@ -2560,7 +2570,7 @@
                 <a:ea typeface="Consolas"/>
                 <a:cs typeface="Consolas"/>
               </a:rPr>
-              <a:t>  "document": full_source,</a:t>
+              <a:t>  "grounding": evidence_support,</a:t>
             </a:r>
           </a:p>
         </p:txBody>
@@ -2617,7 +2627,7 @@
                 <a:ea typeface="Consolas"/>
                 <a:cs typeface="Consolas"/>
               </a:rPr>
-              <a:t>  "question": current_question  }</a:t>
+              <a:t>  "RAG": selected_evidence }</a:t>
             </a:r>
           </a:p>
         </p:txBody>
@@ -2674,7 +2684,7 @@
                 <a:ea typeface="Calibri"/>
                 <a:cs typeface="Calibri"/>
               </a:rPr>
-              <a:t>Budget the complete request—not the document in isolation.</a:t>
+              <a:t>Mechanisms can coexist; none is a synonym for another.</a:t>
             </a:r>
           </a:p>
         </p:txBody>
@@ -2854,7 +2864,7 @@
                 <a:ea typeface="Calibri"/>
                 <a:cs typeface="Calibri"/>
               </a:rPr>
-              <a:t>CONTEXT</a:t>
+              <a:t>BOUNDARIES</a:t>
             </a:r>
           </a:p>
         </p:txBody>
@@ -2997,7 +3007,7 @@
                 <a:ea typeface="Calibri"/>
                 <a:cs typeface="Calibri"/>
               </a:rPr>
-              <a:t>CAG ARCHITECTURE</a:t>
+              <a:t>ROUTING CONTRACT</a:t>
             </a:r>
           </a:p>
         </p:txBody>
@@ -3054,7 +3064,7 @@
                 <a:ea typeface="Calibri"/>
                 <a:cs typeface="Calibri"/>
               </a:rPr>
-              <a:t>A full-context answer passes through four explicit stages</a:t>
+              <a:t>ContextDecision makes the CAG/RAG gate inspectable</a:t>
             </a:r>
           </a:p>
         </p:txBody>
@@ -3168,7 +3178,7 @@
                 <a:ea typeface="Calibri"/>
                 <a:cs typeface="Calibri"/>
               </a:rPr>
-              <a:t>Complete document</a:t>
+              <a:t>Estimate complete input</a:t>
             </a:r>
           </a:p>
         </p:txBody>
@@ -3225,7 +3235,7 @@
                 <a:ea typeface="Calibri"/>
                 <a:cs typeface="Calibri"/>
               </a:rPr>
-              <a:t>LOAD</a:t>
+              <a:t>COUNT</a:t>
             </a:r>
           </a:p>
         </p:txBody>
@@ -3372,7 +3382,7 @@
                 <a:ea typeface="Calibri"/>
                 <a:cs typeface="Calibri"/>
               </a:rPr>
-              <a:t>Context budget</a:t>
+              <a:t>Compare available capacity</a:t>
             </a:r>
           </a:p>
         </p:txBody>
@@ -3429,7 +3439,7 @@
                 <a:ea typeface="Calibri"/>
                 <a:cs typeface="Calibri"/>
               </a:rPr>
-              <a:t>GATE</a:t>
+              <a:t>DECIDE</a:t>
             </a:r>
           </a:p>
         </p:txBody>
@@ -3576,7 +3586,7 @@
                 <a:ea typeface="Calibri"/>
                 <a:cs typeface="Calibri"/>
               </a:rPr>
-              <a:t>Stable prompt prefix</a:t>
+              <a:t>Return route + reason</a:t>
             </a:r>
           </a:p>
         </p:txBody>
@@ -3633,7 +3643,7 @@
                 <a:ea typeface="Calibri"/>
                 <a:cs typeface="Calibri"/>
               </a:rPr>
-              <a:t>REUSE</a:t>
+              <a:t>RECORD</a:t>
             </a:r>
           </a:p>
         </p:txBody>
@@ -3780,7 +3790,7 @@
                 <a:ea typeface="Calibri"/>
                 <a:cs typeface="Calibri"/>
               </a:rPr>
-              <a:t>Grounded model answer</a:t>
+              <a:t>Generate only after gate</a:t>
             </a:r>
           </a:p>
         </p:txBody>
@@ -3837,7 +3847,7 @@
                 <a:ea typeface="Calibri"/>
                 <a:cs typeface="Calibri"/>
               </a:rPr>
-              <a:t>VERIFY</a:t>
+              <a:t>RUN</a:t>
             </a:r>
           </a:p>
         </p:txBody>
@@ -3962,7 +3972,7 @@
                 <a:ea typeface="Calibri"/>
                 <a:cs typeface="Calibri"/>
               </a:rPr>
-              <a:t>BOUNDED SOURCE</a:t>
+              <a:t>TYPED STATE</a:t>
             </a:r>
           </a:p>
         </p:txBody>
@@ -4019,8 +4029,8 @@
                 <a:ea typeface="Calibri"/>
                 <a:cs typeface="Calibri"/>
               </a:rPr>
-              <a:t>CAG
-path</a:t>
+              <a:t>Context
+Decision</a:t>
             </a:r>
           </a:p>
         </p:txBody>
@@ -4077,8 +4087,8 @@
                 <a:ea typeface="Calibri"/>
                 <a:cs typeface="Calibri"/>
               </a:rPr>
-              <a:t>No retrieval.
-One complete source.</a:t>
+              <a:t>route · tokens
+reason</a:t>
             </a:r>
           </a:p>
         </p:txBody>
@@ -4135,7 +4145,7 @@
                 <a:ea typeface="Calibri"/>
                 <a:cs typeface="Calibri"/>
               </a:rPr>
-              <a:t>If the gate rejects the prompt, stop before the model call.</a:t>
+              <a:t>The same object becomes trace data in Lesson 07.</a:t>
             </a:r>
           </a:p>
         </p:txBody>
@@ -4315,7 +4325,7 @@
                 <a:ea typeface="Calibri"/>
                 <a:cs typeface="Calibri"/>
               </a:rPr>
-              <a:t>ARCHITECTURE</a:t>
+              <a:t>DECISION</a:t>
             </a:r>
           </a:p>
         </p:txBody>

--- a/decks/03-cag-financial-document.pptx
+++ b/decks/03-cag-financial-document.pptx
@@ -2,19 +2,19 @@
 <file path=ppt/presentation.xml><?xml version="1.0" encoding="utf-8"?>
 <p:presentation xmlns:p="http://schemas.openxmlformats.org/presentationml/2006/main">
   <p:sldMasterIdLst>
-    <p:sldMasterId xmlns:r="http://schemas.openxmlformats.org/officeDocument/2006/relationships" id="2147483648" r:id="Rfe92902160a44f93"/>
+    <p:sldMasterId xmlns:r="http://schemas.openxmlformats.org/officeDocument/2006/relationships" id="2147483648" r:id="Rfe20e093630742ae"/>
   </p:sldMasterIdLst>
   <p:notesMasterIdLst>
-    <p:notesMasterId xmlns:r="http://schemas.openxmlformats.org/officeDocument/2006/relationships" r:id="Rcd8245817adf417a"/>
+    <p:notesMasterId xmlns:r="http://schemas.openxmlformats.org/officeDocument/2006/relationships" r:id="Rd125b9492f254ec6"/>
   </p:notesMasterIdLst>
   <p:sldIdLst>
-    <p:sldId xmlns:r="http://schemas.openxmlformats.org/officeDocument/2006/relationships" id="256" r:id="R4d24a3c99801437a"/>
-    <p:sldId xmlns:r="http://schemas.openxmlformats.org/officeDocument/2006/relationships" id="257" r:id="R610eba24c6ef4c32"/>
-    <p:sldId xmlns:r="http://schemas.openxmlformats.org/officeDocument/2006/relationships" id="258" r:id="R51bc08969ac5430a"/>
-    <p:sldId xmlns:r="http://schemas.openxmlformats.org/officeDocument/2006/relationships" id="259" r:id="R3cb08bfdbc4f45d4"/>
-    <p:sldId xmlns:r="http://schemas.openxmlformats.org/officeDocument/2006/relationships" id="260" r:id="Rb844df666a864661"/>
-    <p:sldId xmlns:r="http://schemas.openxmlformats.org/officeDocument/2006/relationships" id="261" r:id="Rb9c1aed71d8940bd"/>
-    <p:sldId xmlns:r="http://schemas.openxmlformats.org/officeDocument/2006/relationships" id="262" r:id="R02b38c7974334bb7"/>
+    <p:sldId xmlns:r="http://schemas.openxmlformats.org/officeDocument/2006/relationships" id="256" r:id="R826e4f3e30b44882"/>
+    <p:sldId xmlns:r="http://schemas.openxmlformats.org/officeDocument/2006/relationships" id="257" r:id="R30554c0e7bc64d1c"/>
+    <p:sldId xmlns:r="http://schemas.openxmlformats.org/officeDocument/2006/relationships" id="258" r:id="R286efe27989b4be5"/>
+    <p:sldId xmlns:r="http://schemas.openxmlformats.org/officeDocument/2006/relationships" id="259" r:id="Rfdde8bfaf30447fa"/>
+    <p:sldId xmlns:r="http://schemas.openxmlformats.org/officeDocument/2006/relationships" id="260" r:id="R4f6a742e29444350"/>
+    <p:sldId xmlns:r="http://schemas.openxmlformats.org/officeDocument/2006/relationships" id="261" r:id="Re88b444427984b7e"/>
+    <p:sldId xmlns:r="http://schemas.openxmlformats.org/officeDocument/2006/relationships" id="262" r:id="Rde2c7e27fb6647cd"/>
   </p:sldIdLst>
   <p:sldSz cx="15240000" cy="8572500"/>
   <p:notesSz cx="6858000" cy="9144000"/>
@@ -1101,7 +1101,7 @@
   </p:cSld>
   <p:clrMap bg1="lt1" tx1="dk1" bg2="lt2" tx2="dk2" accent1="accent1" accent2="accent2" accent3="accent3" accent4="accent4" accent5="accent5" accent6="accent6" hlink="hlink" folHlink="folHlink"/>
   <p:sldLayoutIdLst>
-    <p:sldLayoutId xmlns:r="http://schemas.openxmlformats.org/officeDocument/2006/relationships" id="2147483649" r:id="R14f95d7655864968"/>
+    <p:sldLayoutId xmlns:r="http://schemas.openxmlformats.org/officeDocument/2006/relationships" id="2147483649" r:id="Rbe686148ae2443e9"/>
   </p:sldLayoutIdLst>
   <p:txStyles>
     <p:titleStyle>
@@ -1960,7 +1960,7 @@
                 <a:ea typeface="Calibri"/>
                 <a:cs typeface="Calibri"/>
               </a:rPr>
-              <a:t>Financial Analyst Copilot</a:t>
+              <a:t>First Finance - Arnaud Demes</a:t>
             </a:r>
           </a:p>
         </p:txBody>

--- a/decks/03-cag-financial-document.pptx
+++ b/decks/03-cag-financial-document.pptx
@@ -2,19 +2,21 @@
 <file path=ppt/presentation.xml><?xml version="1.0" encoding="utf-8"?>
 <p:presentation xmlns:p="http://schemas.openxmlformats.org/presentationml/2006/main">
   <p:sldMasterIdLst>
-    <p:sldMasterId xmlns:r="http://schemas.openxmlformats.org/officeDocument/2006/relationships" id="2147483648" r:id="Rfe20e093630742ae"/>
+    <p:sldMasterId xmlns:r="http://schemas.openxmlformats.org/officeDocument/2006/relationships" id="2147483648" r:id="Rc171836cfa134fb9"/>
   </p:sldMasterIdLst>
   <p:notesMasterIdLst>
-    <p:notesMasterId xmlns:r="http://schemas.openxmlformats.org/officeDocument/2006/relationships" r:id="Rd125b9492f254ec6"/>
+    <p:notesMasterId xmlns:r="http://schemas.openxmlformats.org/officeDocument/2006/relationships" r:id="R6afbc287c4fa4b8d"/>
   </p:notesMasterIdLst>
   <p:sldIdLst>
-    <p:sldId xmlns:r="http://schemas.openxmlformats.org/officeDocument/2006/relationships" id="256" r:id="R826e4f3e30b44882"/>
-    <p:sldId xmlns:r="http://schemas.openxmlformats.org/officeDocument/2006/relationships" id="257" r:id="R30554c0e7bc64d1c"/>
-    <p:sldId xmlns:r="http://schemas.openxmlformats.org/officeDocument/2006/relationships" id="258" r:id="R286efe27989b4be5"/>
-    <p:sldId xmlns:r="http://schemas.openxmlformats.org/officeDocument/2006/relationships" id="259" r:id="Rfdde8bfaf30447fa"/>
-    <p:sldId xmlns:r="http://schemas.openxmlformats.org/officeDocument/2006/relationships" id="260" r:id="R4f6a742e29444350"/>
-    <p:sldId xmlns:r="http://schemas.openxmlformats.org/officeDocument/2006/relationships" id="261" r:id="Re88b444427984b7e"/>
-    <p:sldId xmlns:r="http://schemas.openxmlformats.org/officeDocument/2006/relationships" id="262" r:id="Rde2c7e27fb6647cd"/>
+    <p:sldId xmlns:r="http://schemas.openxmlformats.org/officeDocument/2006/relationships" id="256" r:id="Re4eb756ef0204014"/>
+    <p:sldId xmlns:r="http://schemas.openxmlformats.org/officeDocument/2006/relationships" id="257" r:id="Rbb5794a66bec475c"/>
+    <p:sldId xmlns:r="http://schemas.openxmlformats.org/officeDocument/2006/relationships" id="258" r:id="R7ba17464267e43ca"/>
+    <p:sldId xmlns:r="http://schemas.openxmlformats.org/officeDocument/2006/relationships" id="259" r:id="R9387d9c5728c4581"/>
+    <p:sldId xmlns:r="http://schemas.openxmlformats.org/officeDocument/2006/relationships" id="260" r:id="R2c1f3c892f9f4ccd"/>
+    <p:sldId xmlns:r="http://schemas.openxmlformats.org/officeDocument/2006/relationships" id="261" r:id="Rb6d43b8982d44bdc"/>
+    <p:sldId xmlns:r="http://schemas.openxmlformats.org/officeDocument/2006/relationships" id="262" r:id="Rb588fd324958471a"/>
+    <p:sldId xmlns:r="http://schemas.openxmlformats.org/officeDocument/2006/relationships" id="263" r:id="R808ed1438d1f4ad0"/>
+    <p:sldId xmlns:r="http://schemas.openxmlformats.org/officeDocument/2006/relationships" id="264" r:id="Rfb2169458f9948e3"/>
   </p:sldIdLst>
   <p:sldSz cx="15240000" cy="8572500"/>
   <p:notesSz cx="6858000" cy="9144000"/>
@@ -1063,6 +1065,196 @@
 </p:notes>
 </file>
 
+<file path=ppt/notesSlides/notesSlide8.xml><?xml version="1.0" encoding="utf-8"?>
+<p:notes xmlns:p="http://schemas.openxmlformats.org/presentationml/2006/main">
+  <p:cSld>
+    <p:spTree>
+      <p:nvGrpSpPr>
+        <p:cNvPr id="1" name=""/>
+        <p:cNvGrpSpPr/>
+        <p:nvPr/>
+      </p:nvGrpSpPr>
+      <p:grpSpPr>
+        <a:xfrm xmlns:a="http://schemas.openxmlformats.org/drawingml/2006/main"/>
+      </p:grpSpPr>
+      <p:sp>
+        <p:nvSpPr>
+          <p:cNvPr id="2" name="Slide Image Placeholder 1"/>
+          <p:cNvSpPr>
+            <a:spLocks xmlns:a="http://schemas.openxmlformats.org/drawingml/2006/main" noGrp="1"/>
+          </p:cNvSpPr>
+          <p:nvPr>
+            <p:ph type="sldImg" idx="0"/>
+          </p:nvPr>
+        </p:nvSpPr>
+        <p:spPr/>
+      </p:sp>
+      <p:sp>
+        <p:nvSpPr>
+          <p:cNvPr id="3" name="Notes Placeholder 2"/>
+          <p:cNvSpPr>
+            <a:spLocks xmlns:a="http://schemas.openxmlformats.org/drawingml/2006/main" noGrp="1"/>
+          </p:cNvSpPr>
+          <p:nvPr>
+            <p:ph type="body" idx="1"/>
+          </p:nvPr>
+        </p:nvSpPr>
+        <p:spPr/>
+        <p:txBody>
+          <a:bodyPr xmlns:a="http://schemas.openxmlformats.org/drawingml/2006/main"/>
+          <a:lstStyle xmlns:a="http://schemas.openxmlformats.org/drawingml/2006/main"/>
+          <a:p xmlns:a="http://schemas.openxmlformats.org/drawingml/2006/main">
+            <a:r>
+              <a:t>Instructor purpose: Check the three core decisions before the lesson closes.</a:t>
+            </a:r>
+          </a:p>
+          <a:p xmlns:a="http://schemas.openxmlformats.org/drawingml/2006/main">
+            <a:r>
+              <a:t>Planned timing: 3 minutes.</a:t>
+            </a:r>
+          </a:p>
+          <a:p xmlns:a="http://schemas.openxmlformats.org/drawingml/2006/main">
+            <a:r>
+              <a:t>Facilitation: ask for one letter per question.</a:t>
+            </a:r>
+          </a:p>
+          <a:p xmlns:a="http://schemas.openxmlformats.org/drawingml/2006/main">
+            <a:r>
+              <a:t>[Sources]</a:t>
+            </a:r>
+          </a:p>
+          <a:p xmlns:a="http://schemas.openxmlformats.org/drawingml/2006/main">
+            <a:r>
+              <a:t>- chapters/03-cag-financial-document.md</a:t>
+            </a:r>
+          </a:p>
+          <a:p xmlns:a="http://schemas.openxmlformats.org/drawingml/2006/main">
+            <a:r>
+              <a:t>[/Sources]</a:t>
+            </a:r>
+          </a:p>
+        </p:txBody>
+      </p:sp>
+      <p:sp>
+        <p:nvSpPr>
+          <p:cNvPr id="4" name="Slide Number Placeholder 3"/>
+          <p:cNvSpPr>
+            <a:spLocks xmlns:a="http://schemas.openxmlformats.org/drawingml/2006/main" noGrp="1"/>
+          </p:cNvSpPr>
+          <p:nvPr>
+            <p:ph type="sldNum" idx="5"/>
+          </p:nvPr>
+        </p:nvSpPr>
+        <p:spPr/>
+        <p:txBody>
+          <a:bodyPr xmlns:a="http://schemas.openxmlformats.org/drawingml/2006/main"/>
+          <a:lstStyle xmlns:a="http://schemas.openxmlformats.org/drawingml/2006/main"/>
+          <a:p xmlns:a="http://schemas.openxmlformats.org/drawingml/2006/main"/>
+        </p:txBody>
+      </p:sp>
+    </p:spTree>
+  </p:cSld>
+  <p:clrMapOvr>
+    <a:masterClrMapping xmlns:a="http://schemas.openxmlformats.org/drawingml/2006/main"/>
+  </p:clrMapOvr>
+</p:notes>
+</file>
+
+<file path=ppt/notesSlides/notesSlide9.xml><?xml version="1.0" encoding="utf-8"?>
+<p:notes xmlns:p="http://schemas.openxmlformats.org/presentationml/2006/main">
+  <p:cSld>
+    <p:spTree>
+      <p:nvGrpSpPr>
+        <p:cNvPr id="1" name=""/>
+        <p:cNvGrpSpPr/>
+        <p:nvPr/>
+      </p:nvGrpSpPr>
+      <p:grpSpPr>
+        <a:xfrm xmlns:a="http://schemas.openxmlformats.org/drawingml/2006/main"/>
+      </p:grpSpPr>
+      <p:sp>
+        <p:nvSpPr>
+          <p:cNvPr id="2" name="Slide Image Placeholder 1"/>
+          <p:cNvSpPr>
+            <a:spLocks xmlns:a="http://schemas.openxmlformats.org/drawingml/2006/main" noGrp="1"/>
+          </p:cNvSpPr>
+          <p:nvPr>
+            <p:ph type="sldImg" idx="0"/>
+          </p:nvPr>
+        </p:nvSpPr>
+        <p:spPr/>
+      </p:sp>
+      <p:sp>
+        <p:nvSpPr>
+          <p:cNvPr id="3" name="Notes Placeholder 2"/>
+          <p:cNvSpPr>
+            <a:spLocks xmlns:a="http://schemas.openxmlformats.org/drawingml/2006/main" noGrp="1"/>
+          </p:cNvSpPr>
+          <p:nvPr>
+            <p:ph type="body" idx="1"/>
+          </p:nvPr>
+        </p:nvSpPr>
+        <p:spPr/>
+        <p:txBody>
+          <a:bodyPr xmlns:a="http://schemas.openxmlformats.org/drawingml/2006/main"/>
+          <a:lstStyle xmlns:a="http://schemas.openxmlformats.org/drawingml/2006/main"/>
+          <a:p xmlns:a="http://schemas.openxmlformats.org/drawingml/2006/main">
+            <a:r>
+              <a:t>Instructor purpose: Correct the quiz and restate the practical rule behind each answer.</a:t>
+            </a:r>
+          </a:p>
+          <a:p xmlns:a="http://schemas.openxmlformats.org/drawingml/2006/main">
+            <a:r>
+              <a:t>Planned timing: 3 minutes.</a:t>
+            </a:r>
+          </a:p>
+          <a:p xmlns:a="http://schemas.openxmlformats.org/drawingml/2006/main">
+            <a:r>
+              <a:t>Facilitation: ask learners to explain each rule in their own words.</a:t>
+            </a:r>
+          </a:p>
+          <a:p xmlns:a="http://schemas.openxmlformats.org/drawingml/2006/main">
+            <a:r>
+              <a:t>[Sources]</a:t>
+            </a:r>
+          </a:p>
+          <a:p xmlns:a="http://schemas.openxmlformats.org/drawingml/2006/main">
+            <a:r>
+              <a:t>- chapters/03-cag-financial-document.md</a:t>
+            </a:r>
+          </a:p>
+          <a:p xmlns:a="http://schemas.openxmlformats.org/drawingml/2006/main">
+            <a:r>
+              <a:t>[/Sources]</a:t>
+            </a:r>
+          </a:p>
+        </p:txBody>
+      </p:sp>
+      <p:sp>
+        <p:nvSpPr>
+          <p:cNvPr id="4" name="Slide Number Placeholder 3"/>
+          <p:cNvSpPr>
+            <a:spLocks xmlns:a="http://schemas.openxmlformats.org/drawingml/2006/main" noGrp="1"/>
+          </p:cNvSpPr>
+          <p:nvPr>
+            <p:ph type="sldNum" idx="5"/>
+          </p:nvPr>
+        </p:nvSpPr>
+        <p:spPr/>
+        <p:txBody>
+          <a:bodyPr xmlns:a="http://schemas.openxmlformats.org/drawingml/2006/main"/>
+          <a:lstStyle xmlns:a="http://schemas.openxmlformats.org/drawingml/2006/main"/>
+          <a:p xmlns:a="http://schemas.openxmlformats.org/drawingml/2006/main"/>
+        </p:txBody>
+      </p:sp>
+    </p:spTree>
+  </p:cSld>
+  <p:clrMapOvr>
+    <a:masterClrMapping xmlns:a="http://schemas.openxmlformats.org/drawingml/2006/main"/>
+  </p:clrMapOvr>
+</p:notes>
+</file>
+
 <file path=ppt/slideLayouts/slideLayout1.xml><?xml version="1.0" encoding="utf-8"?>
 <p:sldLayout xmlns:p="http://schemas.openxmlformats.org/presentationml/2006/main" type="title">
   <p:cSld name="Title Slide">
@@ -1101,7 +1293,7 @@
   </p:cSld>
   <p:clrMap bg1="lt1" tx1="dk1" bg2="lt2" tx2="dk2" accent1="accent1" accent2="accent2" accent3="accent3" accent4="accent4" accent5="accent5" accent6="accent6" hlink="hlink" folHlink="folHlink"/>
   <p:sldLayoutIdLst>
-    <p:sldLayoutId xmlns:r="http://schemas.openxmlformats.org/officeDocument/2006/relationships" id="2147483649" r:id="Rbe686148ae2443e9"/>
+    <p:sldLayoutId xmlns:r="http://schemas.openxmlformats.org/officeDocument/2006/relationships" id="2147483649" r:id="Ra7a4424259d34968"/>
   </p:sldLayoutIdLst>
   <p:txStyles>
     <p:titleStyle>
@@ -8726,6 +8918,1300 @@
 </p:sld>
 </file>
 
+<file path=ppt/slides/slide8.xml><?xml version="1.0" encoding="utf-8"?>
+<p:sld xmlns:p="http://schemas.openxmlformats.org/presentationml/2006/main">
+  <p:cSld>
+    <p:bg>
+      <p:bgPr>
+        <a:solidFill xmlns:a="http://schemas.openxmlformats.org/drawingml/2006/main">
+          <a:srgbClr val="F5F5F5"/>
+        </a:solidFill>
+      </p:bgPr>
+    </p:bg>
+    <p:spTree>
+      <p:nvGrpSpPr>
+        <p:cNvPr id="1" name=""/>
+        <p:cNvGrpSpPr/>
+        <p:nvPr/>
+      </p:nvGrpSpPr>
+      <p:grpSpPr>
+        <a:xfrm xmlns:a="http://schemas.openxmlformats.org/drawingml/2006/main"/>
+      </p:grpSpPr>
+      <p:sp>
+        <p:nvSpPr>
+          <p:cNvPr id="7" name="">
+            <a:extLst xmlns:a="http://schemas.openxmlformats.org/drawingml/2006/main">
+              <a:ext uri="{FF2B5EF4-FFF2-40B4-BE49-F238E27FC236}">
+                <a16:creationId xmlns:a16="http://schemas.microsoft.com/office/drawing/2014/main" id="{1291AC7A-C390-4918-960F-B031B7C93A63}"/>
+              </a:ext>
+            </a:extLst>
+          </p:cNvPr>
+          <p:cNvSpPr>
+            <a:spLocks xmlns:a="http://schemas.openxmlformats.org/drawingml/2006/main" noGrp="1"/>
+          </p:cNvSpPr>
+          <p:nvPr/>
+        </p:nvSpPr>
+        <p:spPr>
+          <a:xfrm xmlns:a="http://schemas.openxmlformats.org/drawingml/2006/main">
+            <a:off x="971550" y="781050"/>
+            <a:ext cx="1257300" cy="76200"/>
+          </a:xfrm>
+          <a:prstGeom xmlns:a="http://schemas.openxmlformats.org/drawingml/2006/main" prst="rect">
+            <a:avLst/>
+          </a:prstGeom>
+          <a:solidFill xmlns:a="http://schemas.openxmlformats.org/drawingml/2006/main">
+            <a:srgbClr val="00A2EB"/>
+          </a:solidFill>
+          <a:ln xmlns:a="http://schemas.openxmlformats.org/drawingml/2006/main" w="9525">
+            <a:solidFill>
+              <a:srgbClr val="00A2EB"/>
+            </a:solidFill>
+            <a:prstDash val="solid"/>
+          </a:ln>
+        </p:spPr>
+      </p:sp>
+      <p:sp>
+        <p:nvSpPr>
+          <p:cNvPr id="2" name="">
+            <a:extLst xmlns:a="http://schemas.openxmlformats.org/drawingml/2006/main">
+              <a:ext uri="{FF2B5EF4-FFF2-40B4-BE49-F238E27FC236}">
+                <a16:creationId xmlns:a16="http://schemas.microsoft.com/office/drawing/2014/main" id="{64682EC5-19B2-4E56-87B3-7ADF11BC6291}"/>
+              </a:ext>
+            </a:extLst>
+          </p:cNvPr>
+          <p:cNvSpPr>
+            <a:spLocks xmlns:a="http://schemas.openxmlformats.org/drawingml/2006/main" noGrp="1"/>
+          </p:cNvSpPr>
+          <p:nvPr/>
+        </p:nvSpPr>
+        <p:spPr>
+          <a:xfrm xmlns:a="http://schemas.openxmlformats.org/drawingml/2006/main">
+            <a:off x="971550" y="1104900"/>
+            <a:ext cx="3048000" cy="304800"/>
+          </a:xfrm>
+          <a:prstGeom xmlns:a="http://schemas.openxmlformats.org/drawingml/2006/main" prst="rect">
+            <a:avLst/>
+          </a:prstGeom>
+          <a:noFill xmlns:a="http://schemas.openxmlformats.org/drawingml/2006/main"/>
+          <a:ln xmlns:a="http://schemas.openxmlformats.org/drawingml/2006/main" w="0">
+            <a:noFill/>
+            <a:prstDash val="solid"/>
+          </a:ln>
+        </p:spPr>
+        <p:txBody>
+          <a:bodyPr xmlns:a="http://schemas.openxmlformats.org/drawingml/2006/main" lIns="0" tIns="0" rIns="0" bIns="0" anchor="t"/>
+          <a:lstStyle xmlns:a="http://schemas.openxmlformats.org/drawingml/2006/main"/>
+          <a:p xmlns:a="http://schemas.openxmlformats.org/drawingml/2006/main">
+            <a:pPr>
+              <a:buNone/>
+              <a:defRPr sz="1500" b="1">
+                <a:solidFill>
+                  <a:srgbClr val="1F40CB"/>
+                </a:solidFill>
+                <a:latin typeface="Calibri"/>
+                <a:ea typeface="Calibri"/>
+                <a:cs typeface="Calibri"/>
+              </a:defRPr>
+            </a:pPr>
+            <a:r>
+              <a:rPr sz="1500" b="1">
+                <a:solidFill>
+                  <a:srgbClr val="1F40CB"/>
+                </a:solidFill>
+                <a:latin typeface="Calibri"/>
+                <a:ea typeface="Calibri"/>
+                <a:cs typeface="Calibri"/>
+              </a:rPr>
+              <a:t>FIRST FINANCE</a:t>
+            </a:r>
+          </a:p>
+        </p:txBody>
+      </p:sp>
+      <p:sp>
+        <p:nvSpPr>
+          <p:cNvPr id="3" name="">
+            <a:extLst xmlns:a="http://schemas.openxmlformats.org/drawingml/2006/main">
+              <a:ext uri="{FF2B5EF4-FFF2-40B4-BE49-F238E27FC236}">
+                <a16:creationId xmlns:a16="http://schemas.microsoft.com/office/drawing/2014/main" id="{728B1E4B-A80D-4DD8-B9C5-6F19ACF9BC87}"/>
+              </a:ext>
+            </a:extLst>
+          </p:cNvPr>
+          <p:cNvSpPr>
+            <a:spLocks xmlns:a="http://schemas.openxmlformats.org/drawingml/2006/main" noGrp="1"/>
+          </p:cNvSpPr>
+          <p:nvPr/>
+        </p:nvSpPr>
+        <p:spPr>
+          <a:xfrm xmlns:a="http://schemas.openxmlformats.org/drawingml/2006/main">
+            <a:off x="971550" y="2400300"/>
+            <a:ext cx="9334500" cy="1000125"/>
+          </a:xfrm>
+          <a:prstGeom xmlns:a="http://schemas.openxmlformats.org/drawingml/2006/main" prst="rect">
+            <a:avLst/>
+          </a:prstGeom>
+          <a:noFill xmlns:a="http://schemas.openxmlformats.org/drawingml/2006/main"/>
+          <a:ln xmlns:a="http://schemas.openxmlformats.org/drawingml/2006/main" w="0">
+            <a:noFill/>
+            <a:prstDash val="solid"/>
+          </a:ln>
+        </p:spPr>
+        <p:txBody>
+          <a:bodyPr xmlns:a="http://schemas.openxmlformats.org/drawingml/2006/main" lIns="0" tIns="0" rIns="0" bIns="0" anchor="t"/>
+          <a:lstStyle xmlns:a="http://schemas.openxmlformats.org/drawingml/2006/main"/>
+          <a:p xmlns:a="http://schemas.openxmlformats.org/drawingml/2006/main">
+            <a:pPr>
+              <a:buNone/>
+              <a:defRPr sz="4950" b="1">
+                <a:solidFill>
+                  <a:srgbClr val="051C2A"/>
+                </a:solidFill>
+                <a:latin typeface="Calibri"/>
+                <a:ea typeface="Calibri"/>
+                <a:cs typeface="Calibri"/>
+              </a:defRPr>
+            </a:pPr>
+            <a:r>
+              <a:rPr sz="4950" b="1">
+                <a:solidFill>
+                  <a:srgbClr val="051C2A"/>
+                </a:solidFill>
+                <a:latin typeface="Calibri"/>
+                <a:ea typeface="Calibri"/>
+                <a:cs typeface="Calibri"/>
+              </a:rPr>
+              <a:t>Quick quiz</a:t>
+            </a:r>
+          </a:p>
+        </p:txBody>
+      </p:sp>
+      <p:sp>
+        <p:nvSpPr>
+          <p:cNvPr id="4" name="">
+            <a:extLst xmlns:a="http://schemas.openxmlformats.org/drawingml/2006/main">
+              <a:ext uri="{FF2B5EF4-FFF2-40B4-BE49-F238E27FC236}">
+                <a16:creationId xmlns:a16="http://schemas.microsoft.com/office/drawing/2014/main" id="{EE83E63A-968D-469D-97F9-C2D3B82A7E4D}"/>
+              </a:ext>
+            </a:extLst>
+          </p:cNvPr>
+          <p:cNvSpPr>
+            <a:spLocks xmlns:a="http://schemas.openxmlformats.org/drawingml/2006/main" noGrp="1"/>
+          </p:cNvSpPr>
+          <p:nvPr/>
+        </p:nvSpPr>
+        <p:spPr>
+          <a:xfrm xmlns:a="http://schemas.openxmlformats.org/drawingml/2006/main">
+            <a:off x="971550" y="3638550"/>
+            <a:ext cx="10668000" cy="552450"/>
+          </a:xfrm>
+          <a:prstGeom xmlns:a="http://schemas.openxmlformats.org/drawingml/2006/main" prst="rect">
+            <a:avLst/>
+          </a:prstGeom>
+          <a:noFill xmlns:a="http://schemas.openxmlformats.org/drawingml/2006/main"/>
+          <a:ln xmlns:a="http://schemas.openxmlformats.org/drawingml/2006/main" w="0">
+            <a:noFill/>
+            <a:prstDash val="solid"/>
+          </a:ln>
+        </p:spPr>
+        <p:txBody>
+          <a:bodyPr xmlns:a="http://schemas.openxmlformats.org/drawingml/2006/main" lIns="0" tIns="0" rIns="0" bIns="0" anchor="t"/>
+          <a:lstStyle xmlns:a="http://schemas.openxmlformats.org/drawingml/2006/main"/>
+          <a:p xmlns:a="http://schemas.openxmlformats.org/drawingml/2006/main">
+            <a:pPr>
+              <a:buNone/>
+              <a:defRPr sz="2400">
+                <a:solidFill>
+                  <a:srgbClr val="373738"/>
+                </a:solidFill>
+                <a:latin typeface="Calibri"/>
+                <a:ea typeface="Calibri"/>
+                <a:cs typeface="Calibri"/>
+              </a:defRPr>
+            </a:pPr>
+            <a:r>
+              <a:rPr sz="2400">
+                <a:solidFill>
+                  <a:srgbClr val="373738"/>
+                </a:solidFill>
+                <a:latin typeface="Calibri"/>
+                <a:ea typeface="Calibri"/>
+                <a:cs typeface="Calibri"/>
+              </a:rPr>
+              <a:t>Choose one answer for each question.</a:t>
+            </a:r>
+          </a:p>
+        </p:txBody>
+      </p:sp>
+      <p:sp>
+        <p:nvSpPr>
+          <p:cNvPr id="5" name="">
+            <a:extLst xmlns:a="http://schemas.openxmlformats.org/drawingml/2006/main">
+              <a:ext uri="{FF2B5EF4-FFF2-40B4-BE49-F238E27FC236}">
+                <a16:creationId xmlns:a16="http://schemas.microsoft.com/office/drawing/2014/main" id="{001333EC-2C9C-4877-BD13-41F8B87FC676}"/>
+              </a:ext>
+            </a:extLst>
+          </p:cNvPr>
+          <p:cNvSpPr>
+            <a:spLocks xmlns:a="http://schemas.openxmlformats.org/drawingml/2006/main" noGrp="1"/>
+          </p:cNvSpPr>
+          <p:nvPr/>
+        </p:nvSpPr>
+        <p:spPr>
+          <a:xfrm xmlns:a="http://schemas.openxmlformats.org/drawingml/2006/main">
+            <a:off x="971550" y="6610350"/>
+            <a:ext cx="9525000" cy="323850"/>
+          </a:xfrm>
+          <a:prstGeom xmlns:a="http://schemas.openxmlformats.org/drawingml/2006/main" prst="rect">
+            <a:avLst/>
+          </a:prstGeom>
+          <a:noFill xmlns:a="http://schemas.openxmlformats.org/drawingml/2006/main"/>
+          <a:ln xmlns:a="http://schemas.openxmlformats.org/drawingml/2006/main" w="0">
+            <a:noFill/>
+            <a:prstDash val="solid"/>
+          </a:ln>
+        </p:spPr>
+        <p:txBody>
+          <a:bodyPr xmlns:a="http://schemas.openxmlformats.org/drawingml/2006/main" lIns="0" tIns="0" rIns="0" bIns="0" anchor="t"/>
+          <a:lstStyle xmlns:a="http://schemas.openxmlformats.org/drawingml/2006/main"/>
+          <a:p xmlns:a="http://schemas.openxmlformats.org/drawingml/2006/main">
+            <a:pPr>
+              <a:buNone/>
+              <a:defRPr sz="1425" b="1">
+                <a:solidFill>
+                  <a:srgbClr val="1F40CB"/>
+                </a:solidFill>
+                <a:latin typeface="Calibri"/>
+                <a:ea typeface="Calibri"/>
+                <a:cs typeface="Calibri"/>
+              </a:defRPr>
+            </a:pPr>
+            <a:r>
+              <a:rPr sz="1425" b="1">
+                <a:solidFill>
+                  <a:srgbClr val="1F40CB"/>
+                </a:solidFill>
+                <a:latin typeface="Calibri"/>
+                <a:ea typeface="Calibri"/>
+                <a:cs typeface="Calibri"/>
+              </a:rPr>
+              <a:t>LESSON 03  ·  3 QUESTIONS  ·  3 MINUTES</a:t>
+            </a:r>
+          </a:p>
+        </p:txBody>
+      </p:sp>
+      <p:sp>
+        <p:nvSpPr>
+          <p:cNvPr id="6" name="">
+            <a:extLst xmlns:a="http://schemas.openxmlformats.org/drawingml/2006/main">
+              <a:ext uri="{FF2B5EF4-FFF2-40B4-BE49-F238E27FC236}">
+                <a16:creationId xmlns:a16="http://schemas.microsoft.com/office/drawing/2014/main" id="{C1C3877F-F854-40AF-9C55-8A4B72F80AEA}"/>
+              </a:ext>
+            </a:extLst>
+          </p:cNvPr>
+          <p:cNvSpPr>
+            <a:spLocks xmlns:a="http://schemas.openxmlformats.org/drawingml/2006/main" noGrp="1"/>
+          </p:cNvSpPr>
+          <p:nvPr/>
+        </p:nvSpPr>
+        <p:spPr>
+          <a:xfrm xmlns:a="http://schemas.openxmlformats.org/drawingml/2006/main">
+            <a:off x="971550" y="7162800"/>
+            <a:ext cx="5143500" cy="361950"/>
+          </a:xfrm>
+          <a:prstGeom xmlns:a="http://schemas.openxmlformats.org/drawingml/2006/main" prst="rect">
+            <a:avLst/>
+          </a:prstGeom>
+          <a:noFill xmlns:a="http://schemas.openxmlformats.org/drawingml/2006/main"/>
+          <a:ln xmlns:a="http://schemas.openxmlformats.org/drawingml/2006/main" w="0">
+            <a:noFill/>
+            <a:prstDash val="solid"/>
+          </a:ln>
+        </p:spPr>
+        <p:txBody>
+          <a:bodyPr xmlns:a="http://schemas.openxmlformats.org/drawingml/2006/main" lIns="0" tIns="0" rIns="0" bIns="0" anchor="t"/>
+          <a:lstStyle xmlns:a="http://schemas.openxmlformats.org/drawingml/2006/main"/>
+          <a:p xmlns:a="http://schemas.openxmlformats.org/drawingml/2006/main">
+            <a:pPr>
+              <a:buNone/>
+              <a:defRPr sz="1800">
+                <a:solidFill>
+                  <a:srgbClr val="051C2A"/>
+                </a:solidFill>
+                <a:latin typeface="Calibri"/>
+                <a:ea typeface="Calibri"/>
+                <a:cs typeface="Calibri"/>
+              </a:defRPr>
+            </a:pPr>
+            <a:r>
+              <a:rPr sz="1800">
+                <a:solidFill>
+                  <a:srgbClr val="051C2A"/>
+                </a:solidFill>
+                <a:latin typeface="Calibri"/>
+                <a:ea typeface="Calibri"/>
+                <a:cs typeface="Calibri"/>
+              </a:rPr>
+              <a:t>First Finance - Arnaud Demes</a:t>
+            </a:r>
+          </a:p>
+        </p:txBody>
+      </p:sp>
+      <p:sp>
+        <p:nvSpPr>
+          <p:cNvPr id="8" name="quiz-question-1">
+            <a:extLst xmlns:a="http://schemas.openxmlformats.org/drawingml/2006/main">
+              <a:ext uri="{FF2B5EF4-FFF2-40B4-BE49-F238E27FC236}">
+                <a16:creationId xmlns:a16="http://schemas.microsoft.com/office/drawing/2014/main" id="{701EDEF2-0EDE-4EBA-8C08-BDFB693E378A}"/>
+              </a:ext>
+            </a:extLst>
+          </p:cNvPr>
+          <p:cNvSpPr>
+            <a:spLocks xmlns:a="http://schemas.openxmlformats.org/drawingml/2006/main" noGrp="1"/>
+          </p:cNvSpPr>
+          <p:nvPr/>
+        </p:nvSpPr>
+        <p:spPr>
+          <a:xfrm xmlns:a="http://schemas.openxmlformats.org/drawingml/2006/main">
+            <a:off x="971550" y="4400550"/>
+            <a:ext cx="13296900" cy="285750"/>
+          </a:xfrm>
+          <a:prstGeom xmlns:a="http://schemas.openxmlformats.org/drawingml/2006/main" prst="rect">
+            <a:avLst/>
+          </a:prstGeom>
+          <a:noFill xmlns:a="http://schemas.openxmlformats.org/drawingml/2006/main"/>
+          <a:ln xmlns:a="http://schemas.openxmlformats.org/drawingml/2006/main" w="0">
+            <a:noFill/>
+            <a:prstDash val="solid"/>
+          </a:ln>
+        </p:spPr>
+        <p:txBody>
+          <a:bodyPr xmlns:a="http://schemas.openxmlformats.org/drawingml/2006/main"/>
+          <a:lstStyle xmlns:a="http://schemas.openxmlformats.org/drawingml/2006/main"/>
+          <a:p xmlns:a="http://schemas.openxmlformats.org/drawingml/2006/main">
+            <a:pPr>
+              <a:defRPr sz="1500" b="1">
+                <a:solidFill>
+                  <a:srgbClr val="001B2E"/>
+                </a:solidFill>
+              </a:defRPr>
+            </a:pPr>
+            <a:r>
+              <a:rPr sz="1500" b="1">
+                <a:solidFill>
+                  <a:srgbClr val="001B2E"/>
+                </a:solidFill>
+              </a:rPr>
+              <a:t>1. When is CAG a good first route?</a:t>
+            </a:r>
+          </a:p>
+        </p:txBody>
+      </p:sp>
+      <p:sp>
+        <p:nvSpPr>
+          <p:cNvPr id="9" name="quiz-options-1">
+            <a:extLst xmlns:a="http://schemas.openxmlformats.org/drawingml/2006/main">
+              <a:ext uri="{FF2B5EF4-FFF2-40B4-BE49-F238E27FC236}">
+                <a16:creationId xmlns:a16="http://schemas.microsoft.com/office/drawing/2014/main" id="{25DC8C3A-7428-4CD7-88ED-402F254679FC}"/>
+              </a:ext>
+            </a:extLst>
+          </p:cNvPr>
+          <p:cNvSpPr>
+            <a:spLocks xmlns:a="http://schemas.openxmlformats.org/drawingml/2006/main" noGrp="1"/>
+          </p:cNvSpPr>
+          <p:nvPr/>
+        </p:nvSpPr>
+        <p:spPr>
+          <a:xfrm xmlns:a="http://schemas.openxmlformats.org/drawingml/2006/main">
+            <a:off x="1257300" y="4705350"/>
+            <a:ext cx="13011150" cy="247650"/>
+          </a:xfrm>
+          <a:prstGeom xmlns:a="http://schemas.openxmlformats.org/drawingml/2006/main" prst="rect">
+            <a:avLst/>
+          </a:prstGeom>
+          <a:noFill xmlns:a="http://schemas.openxmlformats.org/drawingml/2006/main"/>
+          <a:ln xmlns:a="http://schemas.openxmlformats.org/drawingml/2006/main" w="0">
+            <a:noFill/>
+            <a:prstDash val="solid"/>
+          </a:ln>
+        </p:spPr>
+        <p:txBody>
+          <a:bodyPr xmlns:a="http://schemas.openxmlformats.org/drawingml/2006/main"/>
+          <a:lstStyle xmlns:a="http://schemas.openxmlformats.org/drawingml/2006/main"/>
+          <a:p xmlns:a="http://schemas.openxmlformats.org/drawingml/2006/main">
+            <a:pPr>
+              <a:defRPr sz="1200" b="0">
+                <a:solidFill>
+                  <a:srgbClr val="334155"/>
+                </a:solidFill>
+              </a:defRPr>
+            </a:pPr>
+            <a:r>
+              <a:rPr sz="1200" b="0">
+                <a:solidFill>
+                  <a:srgbClr val="334155"/>
+                </a:solidFill>
+              </a:rPr>
+              <a:t>A  One bounded document fits     |     B  Millions of files     |     C  No source exists</a:t>
+            </a:r>
+          </a:p>
+        </p:txBody>
+      </p:sp>
+      <p:sp>
+        <p:nvSpPr>
+          <p:cNvPr id="10" name="quiz-question-2">
+            <a:extLst xmlns:a="http://schemas.openxmlformats.org/drawingml/2006/main">
+              <a:ext uri="{FF2B5EF4-FFF2-40B4-BE49-F238E27FC236}">
+                <a16:creationId xmlns:a16="http://schemas.microsoft.com/office/drawing/2014/main" id="{345F5A28-D23A-47D4-9557-51B2B0412DA9}"/>
+              </a:ext>
+            </a:extLst>
+          </p:cNvPr>
+          <p:cNvSpPr>
+            <a:spLocks xmlns:a="http://schemas.openxmlformats.org/drawingml/2006/main" noGrp="1"/>
+          </p:cNvSpPr>
+          <p:nvPr/>
+        </p:nvSpPr>
+        <p:spPr>
+          <a:xfrm xmlns:a="http://schemas.openxmlformats.org/drawingml/2006/main">
+            <a:off x="971550" y="5086350"/>
+            <a:ext cx="13296900" cy="285750"/>
+          </a:xfrm>
+          <a:prstGeom xmlns:a="http://schemas.openxmlformats.org/drawingml/2006/main" prst="rect">
+            <a:avLst/>
+          </a:prstGeom>
+          <a:noFill xmlns:a="http://schemas.openxmlformats.org/drawingml/2006/main"/>
+          <a:ln xmlns:a="http://schemas.openxmlformats.org/drawingml/2006/main" w="0">
+            <a:noFill/>
+            <a:prstDash val="solid"/>
+          </a:ln>
+        </p:spPr>
+        <p:txBody>
+          <a:bodyPr xmlns:a="http://schemas.openxmlformats.org/drawingml/2006/main"/>
+          <a:lstStyle xmlns:a="http://schemas.openxmlformats.org/drawingml/2006/main"/>
+          <a:p xmlns:a="http://schemas.openxmlformats.org/drawingml/2006/main">
+            <a:pPr>
+              <a:defRPr sz="1500" b="1">
+                <a:solidFill>
+                  <a:srgbClr val="001B2E"/>
+                </a:solidFill>
+              </a:defRPr>
+            </a:pPr>
+            <a:r>
+              <a:rPr sz="1500" b="1">
+                <a:solidFill>
+                  <a:srgbClr val="001B2E"/>
+                </a:solidFill>
+              </a:rPr>
+              <a:t>2. Does a cache prove that an answer is grounded?</a:t>
+            </a:r>
+          </a:p>
+        </p:txBody>
+      </p:sp>
+      <p:sp>
+        <p:nvSpPr>
+          <p:cNvPr id="11" name="quiz-options-2">
+            <a:extLst xmlns:a="http://schemas.openxmlformats.org/drawingml/2006/main">
+              <a:ext uri="{FF2B5EF4-FFF2-40B4-BE49-F238E27FC236}">
+                <a16:creationId xmlns:a16="http://schemas.microsoft.com/office/drawing/2014/main" id="{4126F217-F7ED-4ACE-8941-8EA25E978355}"/>
+              </a:ext>
+            </a:extLst>
+          </p:cNvPr>
+          <p:cNvSpPr>
+            <a:spLocks xmlns:a="http://schemas.openxmlformats.org/drawingml/2006/main" noGrp="1"/>
+          </p:cNvSpPr>
+          <p:nvPr/>
+        </p:nvSpPr>
+        <p:spPr>
+          <a:xfrm xmlns:a="http://schemas.openxmlformats.org/drawingml/2006/main">
+            <a:off x="1257300" y="5391150"/>
+            <a:ext cx="13011150" cy="247650"/>
+          </a:xfrm>
+          <a:prstGeom xmlns:a="http://schemas.openxmlformats.org/drawingml/2006/main" prst="rect">
+            <a:avLst/>
+          </a:prstGeom>
+          <a:noFill xmlns:a="http://schemas.openxmlformats.org/drawingml/2006/main"/>
+          <a:ln xmlns:a="http://schemas.openxmlformats.org/drawingml/2006/main" w="0">
+            <a:noFill/>
+            <a:prstDash val="solid"/>
+          </a:ln>
+        </p:spPr>
+        <p:txBody>
+          <a:bodyPr xmlns:a="http://schemas.openxmlformats.org/drawingml/2006/main"/>
+          <a:lstStyle xmlns:a="http://schemas.openxmlformats.org/drawingml/2006/main"/>
+          <a:p xmlns:a="http://schemas.openxmlformats.org/drawingml/2006/main">
+            <a:pPr>
+              <a:defRPr sz="1200" b="0">
+                <a:solidFill>
+                  <a:srgbClr val="334155"/>
+                </a:solidFill>
+              </a:defRPr>
+            </a:pPr>
+            <a:r>
+              <a:rPr sz="1200" b="0">
+                <a:solidFill>
+                  <a:srgbClr val="334155"/>
+                </a:solidFill>
+              </a:rPr>
+              <a:t>A  Always     |     B  No     |     C  Only with streaming</a:t>
+            </a:r>
+          </a:p>
+        </p:txBody>
+      </p:sp>
+      <p:sp>
+        <p:nvSpPr>
+          <p:cNvPr id="12" name="quiz-question-3">
+            <a:extLst xmlns:a="http://schemas.openxmlformats.org/drawingml/2006/main">
+              <a:ext uri="{FF2B5EF4-FFF2-40B4-BE49-F238E27FC236}">
+                <a16:creationId xmlns:a16="http://schemas.microsoft.com/office/drawing/2014/main" id="{53D2F7D8-0E44-44F4-98D9-EB519BF076CF}"/>
+              </a:ext>
+            </a:extLst>
+          </p:cNvPr>
+          <p:cNvSpPr>
+            <a:spLocks xmlns:a="http://schemas.openxmlformats.org/drawingml/2006/main" noGrp="1"/>
+          </p:cNvSpPr>
+          <p:nvPr/>
+        </p:nvSpPr>
+        <p:spPr>
+          <a:xfrm xmlns:a="http://schemas.openxmlformats.org/drawingml/2006/main">
+            <a:off x="971550" y="5772150"/>
+            <a:ext cx="13296900" cy="285750"/>
+          </a:xfrm>
+          <a:prstGeom xmlns:a="http://schemas.openxmlformats.org/drawingml/2006/main" prst="rect">
+            <a:avLst/>
+          </a:prstGeom>
+          <a:noFill xmlns:a="http://schemas.openxmlformats.org/drawingml/2006/main"/>
+          <a:ln xmlns:a="http://schemas.openxmlformats.org/drawingml/2006/main" w="0">
+            <a:noFill/>
+            <a:prstDash val="solid"/>
+          </a:ln>
+        </p:spPr>
+        <p:txBody>
+          <a:bodyPr xmlns:a="http://schemas.openxmlformats.org/drawingml/2006/main"/>
+          <a:lstStyle xmlns:a="http://schemas.openxmlformats.org/drawingml/2006/main"/>
+          <a:p xmlns:a="http://schemas.openxmlformats.org/drawingml/2006/main">
+            <a:pPr>
+              <a:defRPr sz="1500" b="1">
+                <a:solidFill>
+                  <a:srgbClr val="001B2E"/>
+                </a:solidFill>
+              </a:defRPr>
+            </a:pPr>
+            <a:r>
+              <a:rPr sz="1500" b="1">
+                <a:solidFill>
+                  <a:srgbClr val="001B2E"/>
+                </a:solidFill>
+              </a:rPr>
+              <a:t>3. What does RAG do before generation?</a:t>
+            </a:r>
+          </a:p>
+        </p:txBody>
+      </p:sp>
+      <p:sp>
+        <p:nvSpPr>
+          <p:cNvPr id="13" name="quiz-options-3">
+            <a:extLst xmlns:a="http://schemas.openxmlformats.org/drawingml/2006/main">
+              <a:ext uri="{FF2B5EF4-FFF2-40B4-BE49-F238E27FC236}">
+                <a16:creationId xmlns:a16="http://schemas.microsoft.com/office/drawing/2014/main" id="{2E522A68-7CDD-4D76-A2AA-BA692179E867}"/>
+              </a:ext>
+            </a:extLst>
+          </p:cNvPr>
+          <p:cNvSpPr>
+            <a:spLocks xmlns:a="http://schemas.openxmlformats.org/drawingml/2006/main" noGrp="1"/>
+          </p:cNvSpPr>
+          <p:nvPr/>
+        </p:nvSpPr>
+        <p:spPr>
+          <a:xfrm xmlns:a="http://schemas.openxmlformats.org/drawingml/2006/main">
+            <a:off x="1257300" y="6076950"/>
+            <a:ext cx="13011150" cy="247650"/>
+          </a:xfrm>
+          <a:prstGeom xmlns:a="http://schemas.openxmlformats.org/drawingml/2006/main" prst="rect">
+            <a:avLst/>
+          </a:prstGeom>
+          <a:noFill xmlns:a="http://schemas.openxmlformats.org/drawingml/2006/main"/>
+          <a:ln xmlns:a="http://schemas.openxmlformats.org/drawingml/2006/main" w="0">
+            <a:noFill/>
+            <a:prstDash val="solid"/>
+          </a:ln>
+        </p:spPr>
+        <p:txBody>
+          <a:bodyPr xmlns:a="http://schemas.openxmlformats.org/drawingml/2006/main"/>
+          <a:lstStyle xmlns:a="http://schemas.openxmlformats.org/drawingml/2006/main"/>
+          <a:p xmlns:a="http://schemas.openxmlformats.org/drawingml/2006/main">
+            <a:pPr>
+              <a:defRPr sz="1200" b="0">
+                <a:solidFill>
+                  <a:srgbClr val="334155"/>
+                </a:solidFill>
+              </a:defRPr>
+            </a:pPr>
+            <a:r>
+              <a:rPr sz="1200" b="0">
+                <a:solidFill>
+                  <a:srgbClr val="334155"/>
+                </a:solidFill>
+              </a:rPr>
+              <a:t>A  Select evidence     |     B  Train a model     |     C  Remove citations</a:t>
+            </a:r>
+          </a:p>
+        </p:txBody>
+      </p:sp>
+    </p:spTree>
+    <p:extLst>
+      <p:ext uri="{BB962C8B-B14F-4D97-AF65-F5344CB8AC3E}">
+        <p14:creationId xmlns:p14="http://schemas.microsoft.com/office/powerpoint/2010/main" val="767502565"/>
+      </p:ext>
+    </p:extLst>
+  </p:cSld>
+</p:sld>
+</file>
+
+<file path=ppt/slides/slide9.xml><?xml version="1.0" encoding="utf-8"?>
+<p:sld xmlns:p="http://schemas.openxmlformats.org/presentationml/2006/main">
+  <p:cSld>
+    <p:bg>
+      <p:bgPr>
+        <a:solidFill xmlns:a="http://schemas.openxmlformats.org/drawingml/2006/main">
+          <a:srgbClr val="F5F5F5"/>
+        </a:solidFill>
+      </p:bgPr>
+    </p:bg>
+    <p:spTree>
+      <p:nvGrpSpPr>
+        <p:cNvPr id="1" name=""/>
+        <p:cNvGrpSpPr/>
+        <p:nvPr/>
+      </p:nvGrpSpPr>
+      <p:grpSpPr>
+        <a:xfrm xmlns:a="http://schemas.openxmlformats.org/drawingml/2006/main"/>
+      </p:grpSpPr>
+      <p:sp>
+        <p:nvSpPr>
+          <p:cNvPr id="7" name="">
+            <a:extLst xmlns:a="http://schemas.openxmlformats.org/drawingml/2006/main">
+              <a:ext uri="{FF2B5EF4-FFF2-40B4-BE49-F238E27FC236}">
+                <a16:creationId xmlns:a16="http://schemas.microsoft.com/office/drawing/2014/main" id="{1291AC7A-C390-4918-960F-B031B7C93A63}"/>
+              </a:ext>
+            </a:extLst>
+          </p:cNvPr>
+          <p:cNvSpPr>
+            <a:spLocks xmlns:a="http://schemas.openxmlformats.org/drawingml/2006/main" noGrp="1"/>
+          </p:cNvSpPr>
+          <p:nvPr/>
+        </p:nvSpPr>
+        <p:spPr>
+          <a:xfrm xmlns:a="http://schemas.openxmlformats.org/drawingml/2006/main">
+            <a:off x="971550" y="781050"/>
+            <a:ext cx="1257300" cy="76200"/>
+          </a:xfrm>
+          <a:prstGeom xmlns:a="http://schemas.openxmlformats.org/drawingml/2006/main" prst="rect">
+            <a:avLst/>
+          </a:prstGeom>
+          <a:solidFill xmlns:a="http://schemas.openxmlformats.org/drawingml/2006/main">
+            <a:srgbClr val="00A2EB"/>
+          </a:solidFill>
+          <a:ln xmlns:a="http://schemas.openxmlformats.org/drawingml/2006/main" w="9525">
+            <a:solidFill>
+              <a:srgbClr val="00A2EB"/>
+            </a:solidFill>
+            <a:prstDash val="solid"/>
+          </a:ln>
+        </p:spPr>
+      </p:sp>
+      <p:sp>
+        <p:nvSpPr>
+          <p:cNvPr id="2" name="">
+            <a:extLst xmlns:a="http://schemas.openxmlformats.org/drawingml/2006/main">
+              <a:ext uri="{FF2B5EF4-FFF2-40B4-BE49-F238E27FC236}">
+                <a16:creationId xmlns:a16="http://schemas.microsoft.com/office/drawing/2014/main" id="{64682EC5-19B2-4E56-87B3-7ADF11BC6291}"/>
+              </a:ext>
+            </a:extLst>
+          </p:cNvPr>
+          <p:cNvSpPr>
+            <a:spLocks xmlns:a="http://schemas.openxmlformats.org/drawingml/2006/main" noGrp="1"/>
+          </p:cNvSpPr>
+          <p:nvPr/>
+        </p:nvSpPr>
+        <p:spPr>
+          <a:xfrm xmlns:a="http://schemas.openxmlformats.org/drawingml/2006/main">
+            <a:off x="971550" y="1104900"/>
+            <a:ext cx="3048000" cy="304800"/>
+          </a:xfrm>
+          <a:prstGeom xmlns:a="http://schemas.openxmlformats.org/drawingml/2006/main" prst="rect">
+            <a:avLst/>
+          </a:prstGeom>
+          <a:noFill xmlns:a="http://schemas.openxmlformats.org/drawingml/2006/main"/>
+          <a:ln xmlns:a="http://schemas.openxmlformats.org/drawingml/2006/main" w="0">
+            <a:noFill/>
+            <a:prstDash val="solid"/>
+          </a:ln>
+        </p:spPr>
+        <p:txBody>
+          <a:bodyPr xmlns:a="http://schemas.openxmlformats.org/drawingml/2006/main" lIns="0" tIns="0" rIns="0" bIns="0" anchor="t"/>
+          <a:lstStyle xmlns:a="http://schemas.openxmlformats.org/drawingml/2006/main"/>
+          <a:p xmlns:a="http://schemas.openxmlformats.org/drawingml/2006/main">
+            <a:pPr>
+              <a:buNone/>
+              <a:defRPr sz="1500" b="1">
+                <a:solidFill>
+                  <a:srgbClr val="1F40CB"/>
+                </a:solidFill>
+                <a:latin typeface="Calibri"/>
+                <a:ea typeface="Calibri"/>
+                <a:cs typeface="Calibri"/>
+              </a:defRPr>
+            </a:pPr>
+            <a:r>
+              <a:rPr sz="1500" b="1">
+                <a:solidFill>
+                  <a:srgbClr val="1F40CB"/>
+                </a:solidFill>
+                <a:latin typeface="Calibri"/>
+                <a:ea typeface="Calibri"/>
+                <a:cs typeface="Calibri"/>
+              </a:rPr>
+              <a:t>FIRST FINANCE</a:t>
+            </a:r>
+          </a:p>
+        </p:txBody>
+      </p:sp>
+      <p:sp>
+        <p:nvSpPr>
+          <p:cNvPr id="3" name="">
+            <a:extLst xmlns:a="http://schemas.openxmlformats.org/drawingml/2006/main">
+              <a:ext uri="{FF2B5EF4-FFF2-40B4-BE49-F238E27FC236}">
+                <a16:creationId xmlns:a16="http://schemas.microsoft.com/office/drawing/2014/main" id="{728B1E4B-A80D-4DD8-B9C5-6F19ACF9BC87}"/>
+              </a:ext>
+            </a:extLst>
+          </p:cNvPr>
+          <p:cNvSpPr>
+            <a:spLocks xmlns:a="http://schemas.openxmlformats.org/drawingml/2006/main" noGrp="1"/>
+          </p:cNvSpPr>
+          <p:nvPr/>
+        </p:nvSpPr>
+        <p:spPr>
+          <a:xfrm xmlns:a="http://schemas.openxmlformats.org/drawingml/2006/main">
+            <a:off x="971550" y="2400300"/>
+            <a:ext cx="9334500" cy="1000125"/>
+          </a:xfrm>
+          <a:prstGeom xmlns:a="http://schemas.openxmlformats.org/drawingml/2006/main" prst="rect">
+            <a:avLst/>
+          </a:prstGeom>
+          <a:noFill xmlns:a="http://schemas.openxmlformats.org/drawingml/2006/main"/>
+          <a:ln xmlns:a="http://schemas.openxmlformats.org/drawingml/2006/main" w="0">
+            <a:noFill/>
+            <a:prstDash val="solid"/>
+          </a:ln>
+        </p:spPr>
+        <p:txBody>
+          <a:bodyPr xmlns:a="http://schemas.openxmlformats.org/drawingml/2006/main" lIns="0" tIns="0" rIns="0" bIns="0" anchor="t"/>
+          <a:lstStyle xmlns:a="http://schemas.openxmlformats.org/drawingml/2006/main"/>
+          <a:p xmlns:a="http://schemas.openxmlformats.org/drawingml/2006/main">
+            <a:pPr>
+              <a:buNone/>
+              <a:defRPr sz="4950" b="1">
+                <a:solidFill>
+                  <a:srgbClr val="051C2A"/>
+                </a:solidFill>
+                <a:latin typeface="Calibri"/>
+                <a:ea typeface="Calibri"/>
+                <a:cs typeface="Calibri"/>
+              </a:defRPr>
+            </a:pPr>
+            <a:r>
+              <a:rPr sz="4950" b="1">
+                <a:solidFill>
+                  <a:srgbClr val="051C2A"/>
+                </a:solidFill>
+                <a:latin typeface="Calibri"/>
+                <a:ea typeface="Calibri"/>
+                <a:cs typeface="Calibri"/>
+              </a:rPr>
+              <a:t>Answers</a:t>
+            </a:r>
+          </a:p>
+        </p:txBody>
+      </p:sp>
+      <p:sp>
+        <p:nvSpPr>
+          <p:cNvPr id="4" name="">
+            <a:extLst xmlns:a="http://schemas.openxmlformats.org/drawingml/2006/main">
+              <a:ext uri="{FF2B5EF4-FFF2-40B4-BE49-F238E27FC236}">
+                <a16:creationId xmlns:a16="http://schemas.microsoft.com/office/drawing/2014/main" id="{EE83E63A-968D-469D-97F9-C2D3B82A7E4D}"/>
+              </a:ext>
+            </a:extLst>
+          </p:cNvPr>
+          <p:cNvSpPr>
+            <a:spLocks xmlns:a="http://schemas.openxmlformats.org/drawingml/2006/main" noGrp="1"/>
+          </p:cNvSpPr>
+          <p:nvPr/>
+        </p:nvSpPr>
+        <p:spPr>
+          <a:xfrm xmlns:a="http://schemas.openxmlformats.org/drawingml/2006/main">
+            <a:off x="971550" y="3638550"/>
+            <a:ext cx="10668000" cy="552450"/>
+          </a:xfrm>
+          <a:prstGeom xmlns:a="http://schemas.openxmlformats.org/drawingml/2006/main" prst="rect">
+            <a:avLst/>
+          </a:prstGeom>
+          <a:noFill xmlns:a="http://schemas.openxmlformats.org/drawingml/2006/main"/>
+          <a:ln xmlns:a="http://schemas.openxmlformats.org/drawingml/2006/main" w="0">
+            <a:noFill/>
+            <a:prstDash val="solid"/>
+          </a:ln>
+        </p:spPr>
+        <p:txBody>
+          <a:bodyPr xmlns:a="http://schemas.openxmlformats.org/drawingml/2006/main" lIns="0" tIns="0" rIns="0" bIns="0" anchor="t"/>
+          <a:lstStyle xmlns:a="http://schemas.openxmlformats.org/drawingml/2006/main"/>
+          <a:p xmlns:a="http://schemas.openxmlformats.org/drawingml/2006/main">
+            <a:pPr>
+              <a:buNone/>
+              <a:defRPr sz="2400">
+                <a:solidFill>
+                  <a:srgbClr val="373738"/>
+                </a:solidFill>
+                <a:latin typeface="Calibri"/>
+                <a:ea typeface="Calibri"/>
+                <a:cs typeface="Calibri"/>
+              </a:defRPr>
+            </a:pPr>
+            <a:r>
+              <a:rPr sz="2400">
+                <a:solidFill>
+                  <a:srgbClr val="373738"/>
+                </a:solidFill>
+                <a:latin typeface="Calibri"/>
+                <a:ea typeface="Calibri"/>
+                <a:cs typeface="Calibri"/>
+              </a:rPr>
+              <a:t>Check the idea, not only the letter.</a:t>
+            </a:r>
+          </a:p>
+        </p:txBody>
+      </p:sp>
+      <p:sp>
+        <p:nvSpPr>
+          <p:cNvPr id="5" name="">
+            <a:extLst xmlns:a="http://schemas.openxmlformats.org/drawingml/2006/main">
+              <a:ext uri="{FF2B5EF4-FFF2-40B4-BE49-F238E27FC236}">
+                <a16:creationId xmlns:a16="http://schemas.microsoft.com/office/drawing/2014/main" id="{001333EC-2C9C-4877-BD13-41F8B87FC676}"/>
+              </a:ext>
+            </a:extLst>
+          </p:cNvPr>
+          <p:cNvSpPr>
+            <a:spLocks xmlns:a="http://schemas.openxmlformats.org/drawingml/2006/main" noGrp="1"/>
+          </p:cNvSpPr>
+          <p:nvPr/>
+        </p:nvSpPr>
+        <p:spPr>
+          <a:xfrm xmlns:a="http://schemas.openxmlformats.org/drawingml/2006/main">
+            <a:off x="971550" y="6610350"/>
+            <a:ext cx="9525000" cy="323850"/>
+          </a:xfrm>
+          <a:prstGeom xmlns:a="http://schemas.openxmlformats.org/drawingml/2006/main" prst="rect">
+            <a:avLst/>
+          </a:prstGeom>
+          <a:noFill xmlns:a="http://schemas.openxmlformats.org/drawingml/2006/main"/>
+          <a:ln xmlns:a="http://schemas.openxmlformats.org/drawingml/2006/main" w="0">
+            <a:noFill/>
+            <a:prstDash val="solid"/>
+          </a:ln>
+        </p:spPr>
+        <p:txBody>
+          <a:bodyPr xmlns:a="http://schemas.openxmlformats.org/drawingml/2006/main" lIns="0" tIns="0" rIns="0" bIns="0" anchor="t"/>
+          <a:lstStyle xmlns:a="http://schemas.openxmlformats.org/drawingml/2006/main"/>
+          <a:p xmlns:a="http://schemas.openxmlformats.org/drawingml/2006/main">
+            <a:pPr>
+              <a:buNone/>
+              <a:defRPr sz="1425" b="1">
+                <a:solidFill>
+                  <a:srgbClr val="1F40CB"/>
+                </a:solidFill>
+                <a:latin typeface="Calibri"/>
+                <a:ea typeface="Calibri"/>
+                <a:cs typeface="Calibri"/>
+              </a:defRPr>
+            </a:pPr>
+            <a:r>
+              <a:rPr sz="1425" b="1">
+                <a:solidFill>
+                  <a:srgbClr val="1F40CB"/>
+                </a:solidFill>
+                <a:latin typeface="Calibri"/>
+                <a:ea typeface="Calibri"/>
+                <a:cs typeface="Calibri"/>
+              </a:rPr>
+              <a:t>LESSON 03  ·  CORRECTION</a:t>
+            </a:r>
+          </a:p>
+        </p:txBody>
+      </p:sp>
+      <p:sp>
+        <p:nvSpPr>
+          <p:cNvPr id="6" name="">
+            <a:extLst xmlns:a="http://schemas.openxmlformats.org/drawingml/2006/main">
+              <a:ext uri="{FF2B5EF4-FFF2-40B4-BE49-F238E27FC236}">
+                <a16:creationId xmlns:a16="http://schemas.microsoft.com/office/drawing/2014/main" id="{C1C3877F-F854-40AF-9C55-8A4B72F80AEA}"/>
+              </a:ext>
+            </a:extLst>
+          </p:cNvPr>
+          <p:cNvSpPr>
+            <a:spLocks xmlns:a="http://schemas.openxmlformats.org/drawingml/2006/main" noGrp="1"/>
+          </p:cNvSpPr>
+          <p:nvPr/>
+        </p:nvSpPr>
+        <p:spPr>
+          <a:xfrm xmlns:a="http://schemas.openxmlformats.org/drawingml/2006/main">
+            <a:off x="971550" y="7162800"/>
+            <a:ext cx="5143500" cy="361950"/>
+          </a:xfrm>
+          <a:prstGeom xmlns:a="http://schemas.openxmlformats.org/drawingml/2006/main" prst="rect">
+            <a:avLst/>
+          </a:prstGeom>
+          <a:noFill xmlns:a="http://schemas.openxmlformats.org/drawingml/2006/main"/>
+          <a:ln xmlns:a="http://schemas.openxmlformats.org/drawingml/2006/main" w="0">
+            <a:noFill/>
+            <a:prstDash val="solid"/>
+          </a:ln>
+        </p:spPr>
+        <p:txBody>
+          <a:bodyPr xmlns:a="http://schemas.openxmlformats.org/drawingml/2006/main" lIns="0" tIns="0" rIns="0" bIns="0" anchor="t"/>
+          <a:lstStyle xmlns:a="http://schemas.openxmlformats.org/drawingml/2006/main"/>
+          <a:p xmlns:a="http://schemas.openxmlformats.org/drawingml/2006/main">
+            <a:pPr>
+              <a:buNone/>
+              <a:defRPr sz="1800">
+                <a:solidFill>
+                  <a:srgbClr val="051C2A"/>
+                </a:solidFill>
+                <a:latin typeface="Calibri"/>
+                <a:ea typeface="Calibri"/>
+                <a:cs typeface="Calibri"/>
+              </a:defRPr>
+            </a:pPr>
+            <a:r>
+              <a:rPr sz="1800">
+                <a:solidFill>
+                  <a:srgbClr val="051C2A"/>
+                </a:solidFill>
+                <a:latin typeface="Calibri"/>
+                <a:ea typeface="Calibri"/>
+                <a:cs typeface="Calibri"/>
+              </a:rPr>
+              <a:t>First Finance - Arnaud Demes</a:t>
+            </a:r>
+          </a:p>
+        </p:txBody>
+      </p:sp>
+      <p:sp>
+        <p:nvSpPr>
+          <p:cNvPr id="8" name="quiz-answer-1">
+            <a:extLst xmlns:a="http://schemas.openxmlformats.org/drawingml/2006/main">
+              <a:ext uri="{FF2B5EF4-FFF2-40B4-BE49-F238E27FC236}">
+                <a16:creationId xmlns:a16="http://schemas.microsoft.com/office/drawing/2014/main" id="{1A74C5CB-75F9-48AD-822A-69D990D69B97}"/>
+              </a:ext>
+            </a:extLst>
+          </p:cNvPr>
+          <p:cNvSpPr>
+            <a:spLocks xmlns:a="http://schemas.openxmlformats.org/drawingml/2006/main" noGrp="1"/>
+          </p:cNvSpPr>
+          <p:nvPr/>
+        </p:nvSpPr>
+        <p:spPr>
+          <a:xfrm xmlns:a="http://schemas.openxmlformats.org/drawingml/2006/main">
+            <a:off x="971550" y="4400550"/>
+            <a:ext cx="13296900" cy="285750"/>
+          </a:xfrm>
+          <a:prstGeom xmlns:a="http://schemas.openxmlformats.org/drawingml/2006/main" prst="rect">
+            <a:avLst/>
+          </a:prstGeom>
+          <a:noFill xmlns:a="http://schemas.openxmlformats.org/drawingml/2006/main"/>
+          <a:ln xmlns:a="http://schemas.openxmlformats.org/drawingml/2006/main" w="0">
+            <a:noFill/>
+            <a:prstDash val="solid"/>
+          </a:ln>
+        </p:spPr>
+        <p:txBody>
+          <a:bodyPr xmlns:a="http://schemas.openxmlformats.org/drawingml/2006/main"/>
+          <a:lstStyle xmlns:a="http://schemas.openxmlformats.org/drawingml/2006/main"/>
+          <a:p xmlns:a="http://schemas.openxmlformats.org/drawingml/2006/main">
+            <a:pPr>
+              <a:defRPr sz="1500" b="1">
+                <a:solidFill>
+                  <a:srgbClr val="1F40CB"/>
+                </a:solidFill>
+              </a:defRPr>
+            </a:pPr>
+            <a:r>
+              <a:rPr sz="1500" b="1">
+                <a:solidFill>
+                  <a:srgbClr val="1F40CB"/>
+                </a:solidFill>
+              </a:rPr>
+              <a:t>1. A. One bounded document fits</a:t>
+            </a:r>
+          </a:p>
+        </p:txBody>
+      </p:sp>
+      <p:sp>
+        <p:nvSpPr>
+          <p:cNvPr id="9" name="quiz-explanation-1">
+            <a:extLst xmlns:a="http://schemas.openxmlformats.org/drawingml/2006/main">
+              <a:ext uri="{FF2B5EF4-FFF2-40B4-BE49-F238E27FC236}">
+                <a16:creationId xmlns:a16="http://schemas.microsoft.com/office/drawing/2014/main" id="{207853E3-FB20-44D4-A6D1-BA0D3DB7B8E5}"/>
+              </a:ext>
+            </a:extLst>
+          </p:cNvPr>
+          <p:cNvSpPr>
+            <a:spLocks xmlns:a="http://schemas.openxmlformats.org/drawingml/2006/main" noGrp="1"/>
+          </p:cNvSpPr>
+          <p:nvPr/>
+        </p:nvSpPr>
+        <p:spPr>
+          <a:xfrm xmlns:a="http://schemas.openxmlformats.org/drawingml/2006/main">
+            <a:off x="1257300" y="4705350"/>
+            <a:ext cx="13011150" cy="247650"/>
+          </a:xfrm>
+          <a:prstGeom xmlns:a="http://schemas.openxmlformats.org/drawingml/2006/main" prst="rect">
+            <a:avLst/>
+          </a:prstGeom>
+          <a:noFill xmlns:a="http://schemas.openxmlformats.org/drawingml/2006/main"/>
+          <a:ln xmlns:a="http://schemas.openxmlformats.org/drawingml/2006/main" w="0">
+            <a:noFill/>
+            <a:prstDash val="solid"/>
+          </a:ln>
+        </p:spPr>
+        <p:txBody>
+          <a:bodyPr xmlns:a="http://schemas.openxmlformats.org/drawingml/2006/main"/>
+          <a:lstStyle xmlns:a="http://schemas.openxmlformats.org/drawingml/2006/main"/>
+          <a:p xmlns:a="http://schemas.openxmlformats.org/drawingml/2006/main">
+            <a:pPr>
+              <a:defRPr sz="1200" b="0">
+                <a:solidFill>
+                  <a:srgbClr val="334155"/>
+                </a:solidFill>
+              </a:defRPr>
+            </a:pPr>
+            <a:r>
+              <a:rPr sz="1200" b="0">
+                <a:solidFill>
+                  <a:srgbClr val="334155"/>
+                </a:solidFill>
+              </a:rPr>
+              <a:t>CAG works when the complete source can stay inside the context budget.</a:t>
+            </a:r>
+          </a:p>
+        </p:txBody>
+      </p:sp>
+      <p:sp>
+        <p:nvSpPr>
+          <p:cNvPr id="10" name="quiz-answer-2">
+            <a:extLst xmlns:a="http://schemas.openxmlformats.org/drawingml/2006/main">
+              <a:ext uri="{FF2B5EF4-FFF2-40B4-BE49-F238E27FC236}">
+                <a16:creationId xmlns:a16="http://schemas.microsoft.com/office/drawing/2014/main" id="{78500EFD-B26A-4DAE-9A45-8482BEE63B0B}"/>
+              </a:ext>
+            </a:extLst>
+          </p:cNvPr>
+          <p:cNvSpPr>
+            <a:spLocks xmlns:a="http://schemas.openxmlformats.org/drawingml/2006/main" noGrp="1"/>
+          </p:cNvSpPr>
+          <p:nvPr/>
+        </p:nvSpPr>
+        <p:spPr>
+          <a:xfrm xmlns:a="http://schemas.openxmlformats.org/drawingml/2006/main">
+            <a:off x="971550" y="5086350"/>
+            <a:ext cx="13296900" cy="285750"/>
+          </a:xfrm>
+          <a:prstGeom xmlns:a="http://schemas.openxmlformats.org/drawingml/2006/main" prst="rect">
+            <a:avLst/>
+          </a:prstGeom>
+          <a:noFill xmlns:a="http://schemas.openxmlformats.org/drawingml/2006/main"/>
+          <a:ln xmlns:a="http://schemas.openxmlformats.org/drawingml/2006/main" w="0">
+            <a:noFill/>
+            <a:prstDash val="solid"/>
+          </a:ln>
+        </p:spPr>
+        <p:txBody>
+          <a:bodyPr xmlns:a="http://schemas.openxmlformats.org/drawingml/2006/main"/>
+          <a:lstStyle xmlns:a="http://schemas.openxmlformats.org/drawingml/2006/main"/>
+          <a:p xmlns:a="http://schemas.openxmlformats.org/drawingml/2006/main">
+            <a:pPr>
+              <a:defRPr sz="1500" b="1">
+                <a:solidFill>
+                  <a:srgbClr val="1F40CB"/>
+                </a:solidFill>
+              </a:defRPr>
+            </a:pPr>
+            <a:r>
+              <a:rPr sz="1500" b="1">
+                <a:solidFill>
+                  <a:srgbClr val="1F40CB"/>
+                </a:solidFill>
+              </a:rPr>
+              <a:t>2. B. No</a:t>
+            </a:r>
+          </a:p>
+        </p:txBody>
+      </p:sp>
+      <p:sp>
+        <p:nvSpPr>
+          <p:cNvPr id="11" name="quiz-explanation-2">
+            <a:extLst xmlns:a="http://schemas.openxmlformats.org/drawingml/2006/main">
+              <a:ext uri="{FF2B5EF4-FFF2-40B4-BE49-F238E27FC236}">
+                <a16:creationId xmlns:a16="http://schemas.microsoft.com/office/drawing/2014/main" id="{991B9827-4B74-443A-A5A9-265E5013FBDA}"/>
+              </a:ext>
+            </a:extLst>
+          </p:cNvPr>
+          <p:cNvSpPr>
+            <a:spLocks xmlns:a="http://schemas.openxmlformats.org/drawingml/2006/main" noGrp="1"/>
+          </p:cNvSpPr>
+          <p:nvPr/>
+        </p:nvSpPr>
+        <p:spPr>
+          <a:xfrm xmlns:a="http://schemas.openxmlformats.org/drawingml/2006/main">
+            <a:off x="1257300" y="5391150"/>
+            <a:ext cx="13011150" cy="247650"/>
+          </a:xfrm>
+          <a:prstGeom xmlns:a="http://schemas.openxmlformats.org/drawingml/2006/main" prst="rect">
+            <a:avLst/>
+          </a:prstGeom>
+          <a:noFill xmlns:a="http://schemas.openxmlformats.org/drawingml/2006/main"/>
+          <a:ln xmlns:a="http://schemas.openxmlformats.org/drawingml/2006/main" w="0">
+            <a:noFill/>
+            <a:prstDash val="solid"/>
+          </a:ln>
+        </p:spPr>
+        <p:txBody>
+          <a:bodyPr xmlns:a="http://schemas.openxmlformats.org/drawingml/2006/main"/>
+          <a:lstStyle xmlns:a="http://schemas.openxmlformats.org/drawingml/2006/main"/>
+          <a:p xmlns:a="http://schemas.openxmlformats.org/drawingml/2006/main">
+            <a:pPr>
+              <a:defRPr sz="1200" b="0">
+                <a:solidFill>
+                  <a:srgbClr val="334155"/>
+                </a:solidFill>
+              </a:defRPr>
+            </a:pPr>
+            <a:r>
+              <a:rPr sz="1200" b="0">
+                <a:solidFill>
+                  <a:srgbClr val="334155"/>
+                </a:solidFill>
+              </a:rPr>
+              <a:t>A cache reuses input bytes; grounding still needs evidence checks.</a:t>
+            </a:r>
+          </a:p>
+        </p:txBody>
+      </p:sp>
+      <p:sp>
+        <p:nvSpPr>
+          <p:cNvPr id="12" name="quiz-answer-3">
+            <a:extLst xmlns:a="http://schemas.openxmlformats.org/drawingml/2006/main">
+              <a:ext uri="{FF2B5EF4-FFF2-40B4-BE49-F238E27FC236}">
+                <a16:creationId xmlns:a16="http://schemas.microsoft.com/office/drawing/2014/main" id="{6DDBC1B7-1AF6-4212-AA76-7629EF169598}"/>
+              </a:ext>
+            </a:extLst>
+          </p:cNvPr>
+          <p:cNvSpPr>
+            <a:spLocks xmlns:a="http://schemas.openxmlformats.org/drawingml/2006/main" noGrp="1"/>
+          </p:cNvSpPr>
+          <p:nvPr/>
+        </p:nvSpPr>
+        <p:spPr>
+          <a:xfrm xmlns:a="http://schemas.openxmlformats.org/drawingml/2006/main">
+            <a:off x="971550" y="5772150"/>
+            <a:ext cx="13296900" cy="285750"/>
+          </a:xfrm>
+          <a:prstGeom xmlns:a="http://schemas.openxmlformats.org/drawingml/2006/main" prst="rect">
+            <a:avLst/>
+          </a:prstGeom>
+          <a:noFill xmlns:a="http://schemas.openxmlformats.org/drawingml/2006/main"/>
+          <a:ln xmlns:a="http://schemas.openxmlformats.org/drawingml/2006/main" w="0">
+            <a:noFill/>
+            <a:prstDash val="solid"/>
+          </a:ln>
+        </p:spPr>
+        <p:txBody>
+          <a:bodyPr xmlns:a="http://schemas.openxmlformats.org/drawingml/2006/main"/>
+          <a:lstStyle xmlns:a="http://schemas.openxmlformats.org/drawingml/2006/main"/>
+          <a:p xmlns:a="http://schemas.openxmlformats.org/drawingml/2006/main">
+            <a:pPr>
+              <a:defRPr sz="1500" b="1">
+                <a:solidFill>
+                  <a:srgbClr val="1F40CB"/>
+                </a:solidFill>
+              </a:defRPr>
+            </a:pPr>
+            <a:r>
+              <a:rPr sz="1500" b="1">
+                <a:solidFill>
+                  <a:srgbClr val="1F40CB"/>
+                </a:solidFill>
+              </a:rPr>
+              <a:t>3. A. Select evidence</a:t>
+            </a:r>
+          </a:p>
+        </p:txBody>
+      </p:sp>
+      <p:sp>
+        <p:nvSpPr>
+          <p:cNvPr id="13" name="quiz-explanation-3">
+            <a:extLst xmlns:a="http://schemas.openxmlformats.org/drawingml/2006/main">
+              <a:ext uri="{FF2B5EF4-FFF2-40B4-BE49-F238E27FC236}">
+                <a16:creationId xmlns:a16="http://schemas.microsoft.com/office/drawing/2014/main" id="{F75A1060-5E96-4C82-9CAB-17B756A91C66}"/>
+              </a:ext>
+            </a:extLst>
+          </p:cNvPr>
+          <p:cNvSpPr>
+            <a:spLocks xmlns:a="http://schemas.openxmlformats.org/drawingml/2006/main" noGrp="1"/>
+          </p:cNvSpPr>
+          <p:nvPr/>
+        </p:nvSpPr>
+        <p:spPr>
+          <a:xfrm xmlns:a="http://schemas.openxmlformats.org/drawingml/2006/main">
+            <a:off x="1257300" y="6076950"/>
+            <a:ext cx="13011150" cy="247650"/>
+          </a:xfrm>
+          <a:prstGeom xmlns:a="http://schemas.openxmlformats.org/drawingml/2006/main" prst="rect">
+            <a:avLst/>
+          </a:prstGeom>
+          <a:noFill xmlns:a="http://schemas.openxmlformats.org/drawingml/2006/main"/>
+          <a:ln xmlns:a="http://schemas.openxmlformats.org/drawingml/2006/main" w="0">
+            <a:noFill/>
+            <a:prstDash val="solid"/>
+          </a:ln>
+        </p:spPr>
+        <p:txBody>
+          <a:bodyPr xmlns:a="http://schemas.openxmlformats.org/drawingml/2006/main"/>
+          <a:lstStyle xmlns:a="http://schemas.openxmlformats.org/drawingml/2006/main"/>
+          <a:p xmlns:a="http://schemas.openxmlformats.org/drawingml/2006/main">
+            <a:pPr>
+              <a:defRPr sz="1200" b="0">
+                <a:solidFill>
+                  <a:srgbClr val="334155"/>
+                </a:solidFill>
+              </a:defRPr>
+            </a:pPr>
+            <a:r>
+              <a:rPr sz="1200" b="0">
+                <a:solidFill>
+                  <a:srgbClr val="334155"/>
+                </a:solidFill>
+              </a:rPr>
+              <a:t>RAG retrieves a smaller relevant evidence set before the model answers.</a:t>
+            </a:r>
+          </a:p>
+        </p:txBody>
+      </p:sp>
+    </p:spTree>
+    <p:extLst>
+      <p:ext uri="{BB962C8B-B14F-4D97-AF65-F5344CB8AC3E}">
+        <p14:creationId xmlns:p14="http://schemas.microsoft.com/office/powerpoint/2010/main" val="767502565"/>
+      </p:ext>
+    </p:extLst>
+  </p:cSld>
+</p:sld>
+</file>
+
 <file path=ppt/theme/theme1.xml><?xml version="1.0" encoding="utf-8"?>
 <a:theme xmlns:a="http://schemas.openxmlformats.org/drawingml/2006/main" name="ChatGPT">
   <a:themeElements>
